--- a/documents/proposals/sliding-space-parking_proposal.pptx
+++ b/documents/proposals/sliding-space-parking_proposal.pptx
@@ -2,18 +2,18 @@
 <file path=ppt/presentation.xml><?xml version="1.0" encoding="utf-8"?>
 <p:presentation xmlns:p="http://schemas.openxmlformats.org/presentationml/2006/main">
   <p:sldMasterIdLst>
-    <p:sldMasterId xmlns:r="http://schemas.openxmlformats.org/officeDocument/2006/relationships" id="2147483648" r:id="R6b209bf2f8604c88"/>
+    <p:sldMasterId xmlns:r="http://schemas.openxmlformats.org/officeDocument/2006/relationships" id="2147483648" r:id="R76372982e9634da2"/>
   </p:sldMasterIdLst>
   <p:notesMasterIdLst>
-    <p:notesMasterId xmlns:r="http://schemas.openxmlformats.org/officeDocument/2006/relationships" r:id="Re60e243ed8984f5e"/>
+    <p:notesMasterId xmlns:r="http://schemas.openxmlformats.org/officeDocument/2006/relationships" r:id="R752e0d6a4a9e4114"/>
   </p:notesMasterIdLst>
   <p:sldIdLst>
-    <p:sldId xmlns:r="http://schemas.openxmlformats.org/officeDocument/2006/relationships" id="256" r:id="Rfea4979695bd4392"/>
-    <p:sldId xmlns:r="http://schemas.openxmlformats.org/officeDocument/2006/relationships" id="257" r:id="R0c1d70433871485b"/>
-    <p:sldId xmlns:r="http://schemas.openxmlformats.org/officeDocument/2006/relationships" id="258" r:id="Rcc744b3b539f4a99"/>
-    <p:sldId xmlns:r="http://schemas.openxmlformats.org/officeDocument/2006/relationships" id="259" r:id="Rf1b9f44564ec4761"/>
-    <p:sldId xmlns:r="http://schemas.openxmlformats.org/officeDocument/2006/relationships" id="260" r:id="Rbbce469316d04435"/>
-    <p:sldId xmlns:r="http://schemas.openxmlformats.org/officeDocument/2006/relationships" id="261" r:id="R8d3dabbfd3c4433b"/>
+    <p:sldId xmlns:r="http://schemas.openxmlformats.org/officeDocument/2006/relationships" id="256" r:id="Re3427c4e7bf94e61"/>
+    <p:sldId xmlns:r="http://schemas.openxmlformats.org/officeDocument/2006/relationships" id="257" r:id="R7af84bf6fe004ec5"/>
+    <p:sldId xmlns:r="http://schemas.openxmlformats.org/officeDocument/2006/relationships" id="258" r:id="Racd628f621ec4919"/>
+    <p:sldId xmlns:r="http://schemas.openxmlformats.org/officeDocument/2006/relationships" id="259" r:id="R261857b7a07a4fea"/>
+    <p:sldId xmlns:r="http://schemas.openxmlformats.org/officeDocument/2006/relationships" id="260" r:id="Rb5f353bf892d4bbb"/>
+    <p:sldId xmlns:r="http://schemas.openxmlformats.org/officeDocument/2006/relationships" id="261" r:id="R13c1503ba82748a6"/>
   </p:sldIdLst>
   <p:sldSz cx="12192000" cy="6858000"/>
   <p:notesSz cx="6858000" cy="9144000"/>
@@ -994,7 +994,7 @@
           <p:cNvPr id="3" name="Title">
             <a:extLst xmlns:a="http://schemas.openxmlformats.org/drawingml/2006/main">
               <a:ext uri="{FF2B5EF4-FFF2-40B4-BE49-F238E27FC236}">
-                <a16:creationId xmlns:a16="http://schemas.microsoft.com/office/drawing/2014/main" id="{5A6F9090-9D05-4354-8DD3-6C27CD468E52}"/>
+                <a16:creationId xmlns:a16="http://schemas.microsoft.com/office/drawing/2014/main" id="{50C4E39D-75E3-4C2D-B7E6-9FF14E4F9D64}"/>
               </a:ext>
             </a:extLst>
           </p:cNvPr>
@@ -1223,7 +1223,7 @@
           <p:cNvPr id="2" name="Subtitle">
             <a:extLst xmlns:a="http://schemas.openxmlformats.org/drawingml/2006/main">
               <a:ext uri="{FF2B5EF4-FFF2-40B4-BE49-F238E27FC236}">
-                <a16:creationId xmlns:a16="http://schemas.microsoft.com/office/drawing/2014/main" id="{4E05145E-058E-4CBC-BC38-5B3CF60B3814}"/>
+                <a16:creationId xmlns:a16="http://schemas.microsoft.com/office/drawing/2014/main" id="{1C87A242-EF7A-471F-9969-70794751B271}"/>
               </a:ext>
             </a:extLst>
           </p:cNvPr>
@@ -1469,7 +1469,7 @@
           <p:cNvPr id="2" name="Section title">
             <a:extLst xmlns:a="http://schemas.openxmlformats.org/drawingml/2006/main">
               <a:ext uri="{FF2B5EF4-FFF2-40B4-BE49-F238E27FC236}">
-                <a16:creationId xmlns:a16="http://schemas.microsoft.com/office/drawing/2014/main" id="{07BF7EC1-371A-49C7-BCBE-EF1B59113966}"/>
+                <a16:creationId xmlns:a16="http://schemas.microsoft.com/office/drawing/2014/main" id="{B5EBAFB4-930D-4D0D-9BAF-22797A937F16}"/>
               </a:ext>
             </a:extLst>
           </p:cNvPr>
@@ -1715,7 +1715,7 @@
           <p:cNvPr id="3" name="Title">
             <a:extLst xmlns:a="http://schemas.openxmlformats.org/drawingml/2006/main">
               <a:ext uri="{FF2B5EF4-FFF2-40B4-BE49-F238E27FC236}">
-                <a16:creationId xmlns:a16="http://schemas.microsoft.com/office/drawing/2014/main" id="{F8506C41-0C78-4A51-ABF8-F03F1A8A1C9C}"/>
+                <a16:creationId xmlns:a16="http://schemas.microsoft.com/office/drawing/2014/main" id="{101EC87C-287A-45F7-B0FC-43D999DEB48A}"/>
               </a:ext>
             </a:extLst>
           </p:cNvPr>
@@ -1944,7 +1944,7 @@
           <p:cNvPr id="2" name="Body">
             <a:extLst xmlns:a="http://schemas.openxmlformats.org/drawingml/2006/main">
               <a:ext uri="{FF2B5EF4-FFF2-40B4-BE49-F238E27FC236}">
-                <a16:creationId xmlns:a16="http://schemas.microsoft.com/office/drawing/2014/main" id="{FAAAEDB8-EBDF-4E9F-9117-748F07C2B561}"/>
+                <a16:creationId xmlns:a16="http://schemas.microsoft.com/office/drawing/2014/main" id="{BAE942B3-2F18-48E9-8CBF-E3522E8148F9}"/>
               </a:ext>
             </a:extLst>
           </p:cNvPr>
@@ -2190,7 +2190,7 @@
           <p:cNvPr id="4" name="Title">
             <a:extLst xmlns:a="http://schemas.openxmlformats.org/drawingml/2006/main">
               <a:ext uri="{FF2B5EF4-FFF2-40B4-BE49-F238E27FC236}">
-                <a16:creationId xmlns:a16="http://schemas.microsoft.com/office/drawing/2014/main" id="{E5A665AE-0A8F-4A9F-AB81-0578A1D5F673}"/>
+                <a16:creationId xmlns:a16="http://schemas.microsoft.com/office/drawing/2014/main" id="{1F10108C-4490-401A-B094-DC863E492457}"/>
               </a:ext>
             </a:extLst>
           </p:cNvPr>
@@ -2419,7 +2419,7 @@
           <p:cNvPr id="2" name="Left column">
             <a:extLst xmlns:a="http://schemas.openxmlformats.org/drawingml/2006/main">
               <a:ext uri="{FF2B5EF4-FFF2-40B4-BE49-F238E27FC236}">
-                <a16:creationId xmlns:a16="http://schemas.microsoft.com/office/drawing/2014/main" id="{443A28FB-38D4-4E1A-AED5-38B59AEB7EBC}"/>
+                <a16:creationId xmlns:a16="http://schemas.microsoft.com/office/drawing/2014/main" id="{B34FB94A-6C9F-4B1B-A711-F3B76386AEF9}"/>
               </a:ext>
             </a:extLst>
           </p:cNvPr>
@@ -2648,7 +2648,7 @@
           <p:cNvPr id="3" name="Right column">
             <a:extLst xmlns:a="http://schemas.openxmlformats.org/drawingml/2006/main">
               <a:ext uri="{FF2B5EF4-FFF2-40B4-BE49-F238E27FC236}">
-                <a16:creationId xmlns:a16="http://schemas.microsoft.com/office/drawing/2014/main" id="{848207A4-3482-4C4C-B86A-EB91AE3FA728}"/>
+                <a16:creationId xmlns:a16="http://schemas.microsoft.com/office/drawing/2014/main" id="{0E563DAA-FAD8-4456-A444-D5F121699CBA}"/>
               </a:ext>
             </a:extLst>
           </p:cNvPr>
@@ -2894,7 +2894,7 @@
           <p:cNvPr id="3" name="Title">
             <a:extLst xmlns:a="http://schemas.openxmlformats.org/drawingml/2006/main">
               <a:ext uri="{FF2B5EF4-FFF2-40B4-BE49-F238E27FC236}">
-                <a16:creationId xmlns:a16="http://schemas.microsoft.com/office/drawing/2014/main" id="{C026EFBF-DAD0-4075-A2B6-511478E8B849}"/>
+                <a16:creationId xmlns:a16="http://schemas.microsoft.com/office/drawing/2014/main" id="{1C472FDF-31A8-4B87-A28A-6592E983EE62}"/>
               </a:ext>
             </a:extLst>
           </p:cNvPr>
@@ -3123,7 +3123,7 @@
           <p:cNvPr id="2" name="Left column">
             <a:extLst xmlns:a="http://schemas.openxmlformats.org/drawingml/2006/main">
               <a:ext uri="{FF2B5EF4-FFF2-40B4-BE49-F238E27FC236}">
-                <a16:creationId xmlns:a16="http://schemas.microsoft.com/office/drawing/2014/main" id="{997C05E2-C996-4004-BC34-789CDF91BB01}"/>
+                <a16:creationId xmlns:a16="http://schemas.microsoft.com/office/drawing/2014/main" id="{C11ED361-0D4F-4AA8-B578-1F35CD720F04}"/>
               </a:ext>
             </a:extLst>
           </p:cNvPr>
@@ -3390,12 +3390,12 @@
   </p:cSld>
   <p:clrMap bg1="lt1" tx1="dk1" bg2="lt2" tx2="dk2" accent1="accent1" accent2="accent2" accent3="accent3" accent4="accent4" accent5="accent5" accent6="accent6" hlink="hlink" folHlink="folHlink"/>
   <p:sldLayoutIdLst>
-    <p:sldLayoutId xmlns:r="http://schemas.openxmlformats.org/officeDocument/2006/relationships" id="2147483649" r:id="Rb31cae42473842f4"/>
-    <p:sldLayoutId xmlns:r="http://schemas.openxmlformats.org/officeDocument/2006/relationships" id="2147483650" r:id="Rdad4af6b76e04f4b"/>
-    <p:sldLayoutId xmlns:r="http://schemas.openxmlformats.org/officeDocument/2006/relationships" id="2147483651" r:id="R2f8301b64cd64501"/>
-    <p:sldLayoutId xmlns:r="http://schemas.openxmlformats.org/officeDocument/2006/relationships" id="2147483652" r:id="Rbc8a241407e14b27"/>
-    <p:sldLayoutId xmlns:r="http://schemas.openxmlformats.org/officeDocument/2006/relationships" id="2147483653" r:id="R45ce0eb720414a25"/>
-    <p:sldLayoutId xmlns:r="http://schemas.openxmlformats.org/officeDocument/2006/relationships" id="2147483654" r:id="Rf597ed4d6e5540d1"/>
+    <p:sldLayoutId xmlns:r="http://schemas.openxmlformats.org/officeDocument/2006/relationships" id="2147483649" r:id="Rea5f97b00daf476b"/>
+    <p:sldLayoutId xmlns:r="http://schemas.openxmlformats.org/officeDocument/2006/relationships" id="2147483650" r:id="R9586419ec1d843bd"/>
+    <p:sldLayoutId xmlns:r="http://schemas.openxmlformats.org/officeDocument/2006/relationships" id="2147483651" r:id="Re4b7b60f68424c2a"/>
+    <p:sldLayoutId xmlns:r="http://schemas.openxmlformats.org/officeDocument/2006/relationships" id="2147483652" r:id="R999e949672634273"/>
+    <p:sldLayoutId xmlns:r="http://schemas.openxmlformats.org/officeDocument/2006/relationships" id="2147483653" r:id="R00c4fbe50c9f4012"/>
+    <p:sldLayoutId xmlns:r="http://schemas.openxmlformats.org/officeDocument/2006/relationships" id="2147483654" r:id="Rca144ea795e14696"/>
   </p:sldLayoutIdLst>
   <p:txStyles>
     <p:titleStyle>
@@ -3943,10 +3943,10 @@
       </p:grpSpPr>
       <p:sp>
         <p:nvSpPr>
-          <p:cNvPr id="7" name="すべる宇宙駐車場">
+          <p:cNvPr id="5" name="すべる宇宙駐車場">
             <a:extLst xmlns:a="http://schemas.openxmlformats.org/drawingml/2006/main">
               <a:ext uri="{FF2B5EF4-FFF2-40B4-BE49-F238E27FC236}">
-                <a16:creationId xmlns:a16="http://schemas.microsoft.com/office/drawing/2014/main" id="{A85B6113-99CE-4E80-A7A1-6F2BD63DC705}"/>
+                <a16:creationId xmlns:a16="http://schemas.microsoft.com/office/drawing/2014/main" id="{569545ED-A612-4159-BD17-AA41F154081A}"/>
               </a:ext>
             </a:extLst>
           </p:cNvPr>
@@ -4108,7 +4108,7 @@
           <p:cNvPr id="2" name="慣性で滑る船を、逆噴射でぴたりと駐車。">
             <a:extLst xmlns:a="http://schemas.openxmlformats.org/drawingml/2006/main">
               <a:ext uri="{FF2B5EF4-FFF2-40B4-BE49-F238E27FC236}">
-                <a16:creationId xmlns:a16="http://schemas.microsoft.com/office/drawing/2014/main" id="{DE550DCC-8A34-4BE2-A6C8-B97DE1A4DD6C}"/>
+                <a16:creationId xmlns:a16="http://schemas.microsoft.com/office/drawing/2014/main" id="{C330ECA9-0DE6-4135-96DA-EB6BDD3D4F77}"/>
               </a:ext>
             </a:extLst>
           </p:cNvPr>
@@ -4265,336 +4265,12 @@
           </a:p>
         </p:txBody>
       </p:sp>
-      <p:sp>
-        <p:nvSpPr>
-          <p:cNvPr id="3" name="すべる宇宙駐車場 / 企画書">
+      <p:pic>
+        <p:nvPicPr>
+          <p:cNvPr id="3" name="">
             <a:extLst xmlns:a="http://schemas.openxmlformats.org/drawingml/2006/main">
               <a:ext uri="{FF2B5EF4-FFF2-40B4-BE49-F238E27FC236}">
-                <a16:creationId xmlns:a16="http://schemas.microsoft.com/office/drawing/2014/main" id="{0EFA7093-C1A3-4B37-9EF8-414364739E42}"/>
-              </a:ext>
-            </a:extLst>
-          </p:cNvPr>
-          <p:cNvSpPr>
-            <a:spLocks xmlns:a="http://schemas.openxmlformats.org/drawingml/2006/main" noGrp="1"/>
-          </p:cNvSpPr>
-          <p:nvPr/>
-        </p:nvSpPr>
-        <p:spPr>
-          <a:xfrm xmlns:a="http://schemas.openxmlformats.org/drawingml/2006/main">
-            <a:off x="609600" y="6448425"/>
-            <a:ext cx="9525000" cy="247650"/>
-          </a:xfrm>
-          <a:prstGeom xmlns:a="http://schemas.openxmlformats.org/drawingml/2006/main" prst="rect">
-            <a:avLst/>
-          </a:prstGeom>
-          <a:noFill xmlns:a="http://schemas.openxmlformats.org/drawingml/2006/main"/>
-          <a:ln xmlns:a="http://schemas.openxmlformats.org/drawingml/2006/main" w="0">
-            <a:noFill/>
-          </a:ln>
-        </p:spPr>
-        <p:txBody>
-          <a:bodyPr xmlns:a="http://schemas.openxmlformats.org/drawingml/2006/main" wrap="square" lIns="0" tIns="0" rIns="0" bIns="0" anchor="t">
-            <a:noAutofit/>
-          </a:bodyPr>
-          <a:lstStyle xmlns:a="http://schemas.openxmlformats.org/drawingml/2006/main">
-            <a:defPPr>
-              <a:defRPr sz="1200" b="0">
-                <a:solidFill>
-                  <a:srgbClr val="BCCBD0"/>
-                </a:solidFill>
-                <a:latin typeface="Meiryo"/>
-                <a:ea typeface="Meiryo"/>
-                <a:cs typeface="Meiryo"/>
-              </a:defRPr>
-            </a:defPPr>
-            <a:lvl1pPr>
-              <a:defRPr sz="1200" b="0">
-                <a:solidFill>
-                  <a:srgbClr val="BCCBD0"/>
-                </a:solidFill>
-                <a:latin typeface="Meiryo"/>
-                <a:ea typeface="Meiryo"/>
-                <a:cs typeface="Meiryo"/>
-              </a:defRPr>
-            </a:lvl1pPr>
-            <a:lvl2pPr>
-              <a:defRPr sz="1200" b="0">
-                <a:solidFill>
-                  <a:srgbClr val="BCCBD0"/>
-                </a:solidFill>
-                <a:latin typeface="Meiryo"/>
-                <a:ea typeface="Meiryo"/>
-                <a:cs typeface="Meiryo"/>
-              </a:defRPr>
-            </a:lvl2pPr>
-            <a:lvl3pPr>
-              <a:defRPr sz="1200" b="0">
-                <a:solidFill>
-                  <a:srgbClr val="BCCBD0"/>
-                </a:solidFill>
-                <a:latin typeface="Meiryo"/>
-                <a:ea typeface="Meiryo"/>
-                <a:cs typeface="Meiryo"/>
-              </a:defRPr>
-            </a:lvl3pPr>
-            <a:lvl4pPr>
-              <a:defRPr sz="1200" b="0">
-                <a:solidFill>
-                  <a:srgbClr val="BCCBD0"/>
-                </a:solidFill>
-                <a:latin typeface="Meiryo"/>
-                <a:ea typeface="Meiryo"/>
-                <a:cs typeface="Meiryo"/>
-              </a:defRPr>
-            </a:lvl4pPr>
-            <a:lvl5pPr>
-              <a:defRPr sz="1200" b="0">
-                <a:solidFill>
-                  <a:srgbClr val="BCCBD0"/>
-                </a:solidFill>
-                <a:latin typeface="Meiryo"/>
-                <a:ea typeface="Meiryo"/>
-                <a:cs typeface="Meiryo"/>
-              </a:defRPr>
-            </a:lvl5pPr>
-            <a:lvl6pPr>
-              <a:defRPr sz="1200" b="0">
-                <a:solidFill>
-                  <a:srgbClr val="BCCBD0"/>
-                </a:solidFill>
-                <a:latin typeface="Meiryo"/>
-                <a:ea typeface="Meiryo"/>
-                <a:cs typeface="Meiryo"/>
-              </a:defRPr>
-            </a:lvl6pPr>
-            <a:lvl7pPr>
-              <a:defRPr sz="1200" b="0">
-                <a:solidFill>
-                  <a:srgbClr val="BCCBD0"/>
-                </a:solidFill>
-                <a:latin typeface="Meiryo"/>
-                <a:ea typeface="Meiryo"/>
-                <a:cs typeface="Meiryo"/>
-              </a:defRPr>
-            </a:lvl7pPr>
-            <a:lvl8pPr>
-              <a:defRPr sz="1200" b="0">
-                <a:solidFill>
-                  <a:srgbClr val="BCCBD0"/>
-                </a:solidFill>
-                <a:latin typeface="Meiryo"/>
-                <a:ea typeface="Meiryo"/>
-                <a:cs typeface="Meiryo"/>
-              </a:defRPr>
-            </a:lvl8pPr>
-            <a:lvl9pPr>
-              <a:defRPr sz="1200" b="0">
-                <a:solidFill>
-                  <a:srgbClr val="BCCBD0"/>
-                </a:solidFill>
-                <a:latin typeface="Meiryo"/>
-                <a:ea typeface="Meiryo"/>
-                <a:cs typeface="Meiryo"/>
-              </a:defRPr>
-            </a:lvl9pPr>
-          </a:lstStyle>
-          <a:p xmlns:a="http://schemas.openxmlformats.org/drawingml/2006/main">
-            <a:pPr>
-              <a:lnSpc>
-                <a:spcPct val="118000"/>
-              </a:lnSpc>
-              <a:buNone/>
-              <a:defRPr sz="1200" b="0">
-                <a:solidFill>
-                  <a:srgbClr val="BCCBD0"/>
-                </a:solidFill>
-                <a:latin typeface="Meiryo"/>
-                <a:ea typeface="Meiryo"/>
-                <a:cs typeface="Meiryo"/>
-              </a:defRPr>
-            </a:pPr>
-            <a:r>
-              <a:rPr sz="1200" b="0">
-                <a:solidFill>
-                  <a:srgbClr val="BCCBD0"/>
-                </a:solidFill>
-                <a:latin typeface="Meiryo"/>
-                <a:ea typeface="Meiryo"/>
-                <a:cs typeface="Meiryo"/>
-              </a:rPr>
-              <a:t>すべる宇宙駐車場 / 企画書</a:t>
-            </a:r>
-          </a:p>
-        </p:txBody>
-      </p:sp>
-      <p:sp>
-        <p:nvSpPr>
-          <p:cNvPr id="4" name="01 / 06">
-            <a:extLst xmlns:a="http://schemas.openxmlformats.org/drawingml/2006/main">
-              <a:ext uri="{FF2B5EF4-FFF2-40B4-BE49-F238E27FC236}">
-                <a16:creationId xmlns:a16="http://schemas.microsoft.com/office/drawing/2014/main" id="{3C5D1F6E-64CE-401E-8BC4-6615CC392FD1}"/>
-              </a:ext>
-            </a:extLst>
-          </p:cNvPr>
-          <p:cNvSpPr>
-            <a:spLocks xmlns:a="http://schemas.openxmlformats.org/drawingml/2006/main" noGrp="1"/>
-          </p:cNvSpPr>
-          <p:nvPr/>
-        </p:nvSpPr>
-        <p:spPr>
-          <a:xfrm xmlns:a="http://schemas.openxmlformats.org/drawingml/2006/main">
-            <a:off x="10668000" y="6448425"/>
-            <a:ext cx="952500" cy="247650"/>
-          </a:xfrm>
-          <a:prstGeom xmlns:a="http://schemas.openxmlformats.org/drawingml/2006/main" prst="rect">
-            <a:avLst/>
-          </a:prstGeom>
-          <a:noFill xmlns:a="http://schemas.openxmlformats.org/drawingml/2006/main"/>
-          <a:ln xmlns:a="http://schemas.openxmlformats.org/drawingml/2006/main" w="0">
-            <a:noFill/>
-          </a:ln>
-        </p:spPr>
-        <p:txBody>
-          <a:bodyPr xmlns:a="http://schemas.openxmlformats.org/drawingml/2006/main" wrap="square" lIns="0" tIns="0" rIns="0" bIns="0" anchor="t">
-            <a:noAutofit/>
-          </a:bodyPr>
-          <a:lstStyle xmlns:a="http://schemas.openxmlformats.org/drawingml/2006/main">
-            <a:defPPr>
-              <a:defRPr sz="1200" b="0">
-                <a:solidFill>
-                  <a:srgbClr val="BCCBD0"/>
-                </a:solidFill>
-                <a:latin typeface="Meiryo"/>
-                <a:ea typeface="Meiryo"/>
-                <a:cs typeface="Meiryo"/>
-              </a:defRPr>
-            </a:defPPr>
-            <a:lvl1pPr>
-              <a:defRPr sz="1200" b="0">
-                <a:solidFill>
-                  <a:srgbClr val="BCCBD0"/>
-                </a:solidFill>
-                <a:latin typeface="Meiryo"/>
-                <a:ea typeface="Meiryo"/>
-                <a:cs typeface="Meiryo"/>
-              </a:defRPr>
-            </a:lvl1pPr>
-            <a:lvl2pPr>
-              <a:defRPr sz="1200" b="0">
-                <a:solidFill>
-                  <a:srgbClr val="BCCBD0"/>
-                </a:solidFill>
-                <a:latin typeface="Meiryo"/>
-                <a:ea typeface="Meiryo"/>
-                <a:cs typeface="Meiryo"/>
-              </a:defRPr>
-            </a:lvl2pPr>
-            <a:lvl3pPr>
-              <a:defRPr sz="1200" b="0">
-                <a:solidFill>
-                  <a:srgbClr val="BCCBD0"/>
-                </a:solidFill>
-                <a:latin typeface="Meiryo"/>
-                <a:ea typeface="Meiryo"/>
-                <a:cs typeface="Meiryo"/>
-              </a:defRPr>
-            </a:lvl3pPr>
-            <a:lvl4pPr>
-              <a:defRPr sz="1200" b="0">
-                <a:solidFill>
-                  <a:srgbClr val="BCCBD0"/>
-                </a:solidFill>
-                <a:latin typeface="Meiryo"/>
-                <a:ea typeface="Meiryo"/>
-                <a:cs typeface="Meiryo"/>
-              </a:defRPr>
-            </a:lvl4pPr>
-            <a:lvl5pPr>
-              <a:defRPr sz="1200" b="0">
-                <a:solidFill>
-                  <a:srgbClr val="BCCBD0"/>
-                </a:solidFill>
-                <a:latin typeface="Meiryo"/>
-                <a:ea typeface="Meiryo"/>
-                <a:cs typeface="Meiryo"/>
-              </a:defRPr>
-            </a:lvl5pPr>
-            <a:lvl6pPr>
-              <a:defRPr sz="1200" b="0">
-                <a:solidFill>
-                  <a:srgbClr val="BCCBD0"/>
-                </a:solidFill>
-                <a:latin typeface="Meiryo"/>
-                <a:ea typeface="Meiryo"/>
-                <a:cs typeface="Meiryo"/>
-              </a:defRPr>
-            </a:lvl6pPr>
-            <a:lvl7pPr>
-              <a:defRPr sz="1200" b="0">
-                <a:solidFill>
-                  <a:srgbClr val="BCCBD0"/>
-                </a:solidFill>
-                <a:latin typeface="Meiryo"/>
-                <a:ea typeface="Meiryo"/>
-                <a:cs typeface="Meiryo"/>
-              </a:defRPr>
-            </a:lvl7pPr>
-            <a:lvl8pPr>
-              <a:defRPr sz="1200" b="0">
-                <a:solidFill>
-                  <a:srgbClr val="BCCBD0"/>
-                </a:solidFill>
-                <a:latin typeface="Meiryo"/>
-                <a:ea typeface="Meiryo"/>
-                <a:cs typeface="Meiryo"/>
-              </a:defRPr>
-            </a:lvl8pPr>
-            <a:lvl9pPr>
-              <a:defRPr sz="1200" b="0">
-                <a:solidFill>
-                  <a:srgbClr val="BCCBD0"/>
-                </a:solidFill>
-                <a:latin typeface="Meiryo"/>
-                <a:ea typeface="Meiryo"/>
-                <a:cs typeface="Meiryo"/>
-              </a:defRPr>
-            </a:lvl9pPr>
-          </a:lstStyle>
-          <a:p xmlns:a="http://schemas.openxmlformats.org/drawingml/2006/main">
-            <a:pPr>
-              <a:lnSpc>
-                <a:spcPct val="118000"/>
-              </a:lnSpc>
-              <a:buNone/>
-              <a:defRPr sz="1200" b="0">
-                <a:solidFill>
-                  <a:srgbClr val="BCCBD0"/>
-                </a:solidFill>
-                <a:latin typeface="Meiryo"/>
-                <a:ea typeface="Meiryo"/>
-                <a:cs typeface="Meiryo"/>
-              </a:defRPr>
-            </a:pPr>
-            <a:r>
-              <a:rPr sz="1200" b="0">
-                <a:solidFill>
-                  <a:srgbClr val="BCCBD0"/>
-                </a:solidFill>
-                <a:latin typeface="Meiryo"/>
-                <a:ea typeface="Meiryo"/>
-                <a:cs typeface="Meiryo"/>
-              </a:rPr>
-              <a:t>01 / 06</a:t>
-            </a:r>
-          </a:p>
-        </p:txBody>
-      </p:sp>
-      <p:pic>
-        <p:nvPicPr>
-          <p:cNvPr id="5" name="">
-            <a:extLst xmlns:a="http://schemas.openxmlformats.org/drawingml/2006/main">
-              <a:ext uri="{FF2B5EF4-FFF2-40B4-BE49-F238E27FC236}">
-                <a16:creationId xmlns:a16="http://schemas.microsoft.com/office/drawing/2014/main" id="{2A5CF690-13C9-4103-8F95-1D9214383C1E}"/>
+                <a16:creationId xmlns:a16="http://schemas.microsoft.com/office/drawing/2014/main" id="{45D84B68-539F-4C4F-989D-B165F3F7F061}"/>
               </a:ext>
             </a:extLst>
           </p:cNvPr>
@@ -4604,7 +4280,7 @@
           <p:nvPr/>
         </p:nvPicPr>
         <p:blipFill>
-          <a:blip xmlns:r="http://schemas.openxmlformats.org/officeDocument/2006/relationships" xmlns:a="http://schemas.openxmlformats.org/drawingml/2006/main" r:embed="R2bc0ff631a7a4f60"/>
+          <a:blip xmlns:r="http://schemas.openxmlformats.org/officeDocument/2006/relationships" xmlns:a="http://schemas.openxmlformats.org/drawingml/2006/main" r:embed="Rb02bc44edac9463e"/>
           <a:stretch xmlns:a="http://schemas.openxmlformats.org/drawingml/2006/main"/>
         </p:blipFill>
         <p:spPr>
@@ -4619,10 +4295,10 @@
       </p:pic>
       <p:sp>
         <p:nvSpPr>
-          <p:cNvPr id="6" name="App Store・unityroom公開 / 制作人数：4人 / Un">
+          <p:cNvPr id="4" name="App Store・unityroom公開 / 制作人数：4人 / Un">
             <a:extLst xmlns:a="http://schemas.openxmlformats.org/drawingml/2006/main">
               <a:ext uri="{FF2B5EF4-FFF2-40B4-BE49-F238E27FC236}">
-                <a16:creationId xmlns:a16="http://schemas.microsoft.com/office/drawing/2014/main" id="{B539D46B-C670-4730-8576-6E7B3293670B}"/>
+                <a16:creationId xmlns:a16="http://schemas.microsoft.com/office/drawing/2014/main" id="{4B823F31-351F-4DAA-B265-91D7E79C0C19}"/>
               </a:ext>
             </a:extLst>
           </p:cNvPr>
@@ -4782,7 +4458,7 @@
     </p:spTree>
     <p:extLst>
       <p:ext uri="{BB962C8B-B14F-4D97-AF65-F5344CB8AC3E}">
-        <p14:creationId xmlns:p14="http://schemas.microsoft.com/office/powerpoint/2010/main" val="1275295335"/>
+        <p14:creationId xmlns:p14="http://schemas.microsoft.com/office/powerpoint/2010/main" val="1236563296"/>
       </p:ext>
     </p:extLst>
   </p:cSld>
@@ -4810,10 +4486,10 @@
       </p:grpSpPr>
       <p:sp>
         <p:nvSpPr>
-          <p:cNvPr id="10" name="身近な「駐車」を、慣性で難しくする">
+          <p:cNvPr id="8" name="身近な「駐車」を、慣性で難しくする">
             <a:extLst xmlns:a="http://schemas.openxmlformats.org/drawingml/2006/main">
               <a:ext uri="{FF2B5EF4-FFF2-40B4-BE49-F238E27FC236}">
-                <a16:creationId xmlns:a16="http://schemas.microsoft.com/office/drawing/2014/main" id="{5DA257D2-0FA2-43D4-962D-6364BE04D43C}"/>
+                <a16:creationId xmlns:a16="http://schemas.microsoft.com/office/drawing/2014/main" id="{0B338D0E-D7E1-44DB-A6B5-A3EDC0A1A0D4}"/>
               </a:ext>
             </a:extLst>
           </p:cNvPr>
@@ -4975,7 +4651,7 @@
           <p:cNvPr id="2" name="目的は、宇宙船を駐車枠の中で止めること">
             <a:extLst xmlns:a="http://schemas.openxmlformats.org/drawingml/2006/main">
               <a:ext uri="{FF2B5EF4-FFF2-40B4-BE49-F238E27FC236}">
-                <a16:creationId xmlns:a16="http://schemas.microsoft.com/office/drawing/2014/main" id="{95BFA9D9-220E-4584-B811-A601F77C9610}"/>
+                <a16:creationId xmlns:a16="http://schemas.microsoft.com/office/drawing/2014/main" id="{1518E730-DF2E-493D-9FA4-4901B20A436B}"/>
               </a:ext>
             </a:extLst>
           </p:cNvPr>
@@ -5132,336 +4808,12 @@
           </a:p>
         </p:txBody>
       </p:sp>
-      <p:sp>
-        <p:nvSpPr>
-          <p:cNvPr id="3" name="すべる宇宙駐車場 / 企画書">
+      <p:pic>
+        <p:nvPicPr>
+          <p:cNvPr id="3" name="">
             <a:extLst xmlns:a="http://schemas.openxmlformats.org/drawingml/2006/main">
               <a:ext uri="{FF2B5EF4-FFF2-40B4-BE49-F238E27FC236}">
-                <a16:creationId xmlns:a16="http://schemas.microsoft.com/office/drawing/2014/main" id="{1B8100B1-5EE9-4FBF-B7D8-774C93C1460E}"/>
-              </a:ext>
-            </a:extLst>
-          </p:cNvPr>
-          <p:cNvSpPr>
-            <a:spLocks xmlns:a="http://schemas.openxmlformats.org/drawingml/2006/main" noGrp="1"/>
-          </p:cNvSpPr>
-          <p:nvPr/>
-        </p:nvSpPr>
-        <p:spPr>
-          <a:xfrm xmlns:a="http://schemas.openxmlformats.org/drawingml/2006/main">
-            <a:off x="609600" y="6448425"/>
-            <a:ext cx="9525000" cy="247650"/>
-          </a:xfrm>
-          <a:prstGeom xmlns:a="http://schemas.openxmlformats.org/drawingml/2006/main" prst="rect">
-            <a:avLst/>
-          </a:prstGeom>
-          <a:noFill xmlns:a="http://schemas.openxmlformats.org/drawingml/2006/main"/>
-          <a:ln xmlns:a="http://schemas.openxmlformats.org/drawingml/2006/main" w="0">
-            <a:noFill/>
-          </a:ln>
-        </p:spPr>
-        <p:txBody>
-          <a:bodyPr xmlns:a="http://schemas.openxmlformats.org/drawingml/2006/main" wrap="square" lIns="0" tIns="0" rIns="0" bIns="0" anchor="t">
-            <a:noAutofit/>
-          </a:bodyPr>
-          <a:lstStyle xmlns:a="http://schemas.openxmlformats.org/drawingml/2006/main">
-            <a:defPPr>
-              <a:defRPr sz="1200" b="0">
-                <a:solidFill>
-                  <a:srgbClr val="BCCBD0"/>
-                </a:solidFill>
-                <a:latin typeface="Meiryo"/>
-                <a:ea typeface="Meiryo"/>
-                <a:cs typeface="Meiryo"/>
-              </a:defRPr>
-            </a:defPPr>
-            <a:lvl1pPr>
-              <a:defRPr sz="1200" b="0">
-                <a:solidFill>
-                  <a:srgbClr val="BCCBD0"/>
-                </a:solidFill>
-                <a:latin typeface="Meiryo"/>
-                <a:ea typeface="Meiryo"/>
-                <a:cs typeface="Meiryo"/>
-              </a:defRPr>
-            </a:lvl1pPr>
-            <a:lvl2pPr>
-              <a:defRPr sz="1200" b="0">
-                <a:solidFill>
-                  <a:srgbClr val="BCCBD0"/>
-                </a:solidFill>
-                <a:latin typeface="Meiryo"/>
-                <a:ea typeface="Meiryo"/>
-                <a:cs typeface="Meiryo"/>
-              </a:defRPr>
-            </a:lvl2pPr>
-            <a:lvl3pPr>
-              <a:defRPr sz="1200" b="0">
-                <a:solidFill>
-                  <a:srgbClr val="BCCBD0"/>
-                </a:solidFill>
-                <a:latin typeface="Meiryo"/>
-                <a:ea typeface="Meiryo"/>
-                <a:cs typeface="Meiryo"/>
-              </a:defRPr>
-            </a:lvl3pPr>
-            <a:lvl4pPr>
-              <a:defRPr sz="1200" b="0">
-                <a:solidFill>
-                  <a:srgbClr val="BCCBD0"/>
-                </a:solidFill>
-                <a:latin typeface="Meiryo"/>
-                <a:ea typeface="Meiryo"/>
-                <a:cs typeface="Meiryo"/>
-              </a:defRPr>
-            </a:lvl4pPr>
-            <a:lvl5pPr>
-              <a:defRPr sz="1200" b="0">
-                <a:solidFill>
-                  <a:srgbClr val="BCCBD0"/>
-                </a:solidFill>
-                <a:latin typeface="Meiryo"/>
-                <a:ea typeface="Meiryo"/>
-                <a:cs typeface="Meiryo"/>
-              </a:defRPr>
-            </a:lvl5pPr>
-            <a:lvl6pPr>
-              <a:defRPr sz="1200" b="0">
-                <a:solidFill>
-                  <a:srgbClr val="BCCBD0"/>
-                </a:solidFill>
-                <a:latin typeface="Meiryo"/>
-                <a:ea typeface="Meiryo"/>
-                <a:cs typeface="Meiryo"/>
-              </a:defRPr>
-            </a:lvl6pPr>
-            <a:lvl7pPr>
-              <a:defRPr sz="1200" b="0">
-                <a:solidFill>
-                  <a:srgbClr val="BCCBD0"/>
-                </a:solidFill>
-                <a:latin typeface="Meiryo"/>
-                <a:ea typeface="Meiryo"/>
-                <a:cs typeface="Meiryo"/>
-              </a:defRPr>
-            </a:lvl7pPr>
-            <a:lvl8pPr>
-              <a:defRPr sz="1200" b="0">
-                <a:solidFill>
-                  <a:srgbClr val="BCCBD0"/>
-                </a:solidFill>
-                <a:latin typeface="Meiryo"/>
-                <a:ea typeface="Meiryo"/>
-                <a:cs typeface="Meiryo"/>
-              </a:defRPr>
-            </a:lvl8pPr>
-            <a:lvl9pPr>
-              <a:defRPr sz="1200" b="0">
-                <a:solidFill>
-                  <a:srgbClr val="BCCBD0"/>
-                </a:solidFill>
-                <a:latin typeface="Meiryo"/>
-                <a:ea typeface="Meiryo"/>
-                <a:cs typeface="Meiryo"/>
-              </a:defRPr>
-            </a:lvl9pPr>
-          </a:lstStyle>
-          <a:p xmlns:a="http://schemas.openxmlformats.org/drawingml/2006/main">
-            <a:pPr>
-              <a:lnSpc>
-                <a:spcPct val="118000"/>
-              </a:lnSpc>
-              <a:buNone/>
-              <a:defRPr sz="1200" b="0">
-                <a:solidFill>
-                  <a:srgbClr val="BCCBD0"/>
-                </a:solidFill>
-                <a:latin typeface="Meiryo"/>
-                <a:ea typeface="Meiryo"/>
-                <a:cs typeface="Meiryo"/>
-              </a:defRPr>
-            </a:pPr>
-            <a:r>
-              <a:rPr sz="1200" b="0">
-                <a:solidFill>
-                  <a:srgbClr val="BCCBD0"/>
-                </a:solidFill>
-                <a:latin typeface="Meiryo"/>
-                <a:ea typeface="Meiryo"/>
-                <a:cs typeface="Meiryo"/>
-              </a:rPr>
-              <a:t>すべる宇宙駐車場 / 企画書</a:t>
-            </a:r>
-          </a:p>
-        </p:txBody>
-      </p:sp>
-      <p:sp>
-        <p:nvSpPr>
-          <p:cNvPr id="4" name="02 / 06">
-            <a:extLst xmlns:a="http://schemas.openxmlformats.org/drawingml/2006/main">
-              <a:ext uri="{FF2B5EF4-FFF2-40B4-BE49-F238E27FC236}">
-                <a16:creationId xmlns:a16="http://schemas.microsoft.com/office/drawing/2014/main" id="{C7BC99C5-A8E0-4EDE-A648-0445ED6648AF}"/>
-              </a:ext>
-            </a:extLst>
-          </p:cNvPr>
-          <p:cNvSpPr>
-            <a:spLocks xmlns:a="http://schemas.openxmlformats.org/drawingml/2006/main" noGrp="1"/>
-          </p:cNvSpPr>
-          <p:nvPr/>
-        </p:nvSpPr>
-        <p:spPr>
-          <a:xfrm xmlns:a="http://schemas.openxmlformats.org/drawingml/2006/main">
-            <a:off x="10668000" y="6448425"/>
-            <a:ext cx="952500" cy="247650"/>
-          </a:xfrm>
-          <a:prstGeom xmlns:a="http://schemas.openxmlformats.org/drawingml/2006/main" prst="rect">
-            <a:avLst/>
-          </a:prstGeom>
-          <a:noFill xmlns:a="http://schemas.openxmlformats.org/drawingml/2006/main"/>
-          <a:ln xmlns:a="http://schemas.openxmlformats.org/drawingml/2006/main" w="0">
-            <a:noFill/>
-          </a:ln>
-        </p:spPr>
-        <p:txBody>
-          <a:bodyPr xmlns:a="http://schemas.openxmlformats.org/drawingml/2006/main" wrap="square" lIns="0" tIns="0" rIns="0" bIns="0" anchor="t">
-            <a:noAutofit/>
-          </a:bodyPr>
-          <a:lstStyle xmlns:a="http://schemas.openxmlformats.org/drawingml/2006/main">
-            <a:defPPr>
-              <a:defRPr sz="1200" b="0">
-                <a:solidFill>
-                  <a:srgbClr val="BCCBD0"/>
-                </a:solidFill>
-                <a:latin typeface="Meiryo"/>
-                <a:ea typeface="Meiryo"/>
-                <a:cs typeface="Meiryo"/>
-              </a:defRPr>
-            </a:defPPr>
-            <a:lvl1pPr>
-              <a:defRPr sz="1200" b="0">
-                <a:solidFill>
-                  <a:srgbClr val="BCCBD0"/>
-                </a:solidFill>
-                <a:latin typeface="Meiryo"/>
-                <a:ea typeface="Meiryo"/>
-                <a:cs typeface="Meiryo"/>
-              </a:defRPr>
-            </a:lvl1pPr>
-            <a:lvl2pPr>
-              <a:defRPr sz="1200" b="0">
-                <a:solidFill>
-                  <a:srgbClr val="BCCBD0"/>
-                </a:solidFill>
-                <a:latin typeface="Meiryo"/>
-                <a:ea typeface="Meiryo"/>
-                <a:cs typeface="Meiryo"/>
-              </a:defRPr>
-            </a:lvl2pPr>
-            <a:lvl3pPr>
-              <a:defRPr sz="1200" b="0">
-                <a:solidFill>
-                  <a:srgbClr val="BCCBD0"/>
-                </a:solidFill>
-                <a:latin typeface="Meiryo"/>
-                <a:ea typeface="Meiryo"/>
-                <a:cs typeface="Meiryo"/>
-              </a:defRPr>
-            </a:lvl3pPr>
-            <a:lvl4pPr>
-              <a:defRPr sz="1200" b="0">
-                <a:solidFill>
-                  <a:srgbClr val="BCCBD0"/>
-                </a:solidFill>
-                <a:latin typeface="Meiryo"/>
-                <a:ea typeface="Meiryo"/>
-                <a:cs typeface="Meiryo"/>
-              </a:defRPr>
-            </a:lvl4pPr>
-            <a:lvl5pPr>
-              <a:defRPr sz="1200" b="0">
-                <a:solidFill>
-                  <a:srgbClr val="BCCBD0"/>
-                </a:solidFill>
-                <a:latin typeface="Meiryo"/>
-                <a:ea typeface="Meiryo"/>
-                <a:cs typeface="Meiryo"/>
-              </a:defRPr>
-            </a:lvl5pPr>
-            <a:lvl6pPr>
-              <a:defRPr sz="1200" b="0">
-                <a:solidFill>
-                  <a:srgbClr val="BCCBD0"/>
-                </a:solidFill>
-                <a:latin typeface="Meiryo"/>
-                <a:ea typeface="Meiryo"/>
-                <a:cs typeface="Meiryo"/>
-              </a:defRPr>
-            </a:lvl6pPr>
-            <a:lvl7pPr>
-              <a:defRPr sz="1200" b="0">
-                <a:solidFill>
-                  <a:srgbClr val="BCCBD0"/>
-                </a:solidFill>
-                <a:latin typeface="Meiryo"/>
-                <a:ea typeface="Meiryo"/>
-                <a:cs typeface="Meiryo"/>
-              </a:defRPr>
-            </a:lvl7pPr>
-            <a:lvl8pPr>
-              <a:defRPr sz="1200" b="0">
-                <a:solidFill>
-                  <a:srgbClr val="BCCBD0"/>
-                </a:solidFill>
-                <a:latin typeface="Meiryo"/>
-                <a:ea typeface="Meiryo"/>
-                <a:cs typeface="Meiryo"/>
-              </a:defRPr>
-            </a:lvl8pPr>
-            <a:lvl9pPr>
-              <a:defRPr sz="1200" b="0">
-                <a:solidFill>
-                  <a:srgbClr val="BCCBD0"/>
-                </a:solidFill>
-                <a:latin typeface="Meiryo"/>
-                <a:ea typeface="Meiryo"/>
-                <a:cs typeface="Meiryo"/>
-              </a:defRPr>
-            </a:lvl9pPr>
-          </a:lstStyle>
-          <a:p xmlns:a="http://schemas.openxmlformats.org/drawingml/2006/main">
-            <a:pPr>
-              <a:lnSpc>
-                <a:spcPct val="118000"/>
-              </a:lnSpc>
-              <a:buNone/>
-              <a:defRPr sz="1200" b="0">
-                <a:solidFill>
-                  <a:srgbClr val="BCCBD0"/>
-                </a:solidFill>
-                <a:latin typeface="Meiryo"/>
-                <a:ea typeface="Meiryo"/>
-                <a:cs typeface="Meiryo"/>
-              </a:defRPr>
-            </a:pPr>
-            <a:r>
-              <a:rPr sz="1200" b="0">
-                <a:solidFill>
-                  <a:srgbClr val="BCCBD0"/>
-                </a:solidFill>
-                <a:latin typeface="Meiryo"/>
-                <a:ea typeface="Meiryo"/>
-                <a:cs typeface="Meiryo"/>
-              </a:rPr>
-              <a:t>02 / 06</a:t>
-            </a:r>
-          </a:p>
-        </p:txBody>
-      </p:sp>
-      <p:pic>
-        <p:nvPicPr>
-          <p:cNvPr id="5" name="">
-            <a:extLst xmlns:a="http://schemas.openxmlformats.org/drawingml/2006/main">
-              <a:ext uri="{FF2B5EF4-FFF2-40B4-BE49-F238E27FC236}">
-                <a16:creationId xmlns:a16="http://schemas.microsoft.com/office/drawing/2014/main" id="{283EF8A2-E789-4675-842C-8C0E8B90AD33}"/>
+                <a16:creationId xmlns:a16="http://schemas.microsoft.com/office/drawing/2014/main" id="{1C7513A4-AFDF-488E-8869-8DA76CC26BD1}"/>
               </a:ext>
             </a:extLst>
           </p:cNvPr>
@@ -5471,7 +4823,7 @@
           <p:nvPr/>
         </p:nvPicPr>
         <p:blipFill>
-          <a:blip xmlns:r="http://schemas.openxmlformats.org/officeDocument/2006/relationships" xmlns:a="http://schemas.openxmlformats.org/drawingml/2006/main" r:embed="Rf910e49b32894ff2"/>
+          <a:blip xmlns:r="http://schemas.openxmlformats.org/officeDocument/2006/relationships" xmlns:a="http://schemas.openxmlformats.org/drawingml/2006/main" r:embed="R8803e26a8fb543f9"/>
           <a:stretch xmlns:a="http://schemas.openxmlformats.org/drawingml/2006/main"/>
         </p:blipFill>
         <p:spPr>
@@ -5486,10 +4838,10 @@
       </p:pic>
       <p:sp>
         <p:nvSpPr>
-          <p:cNvPr id="6" name="操作と狙い">
+          <p:cNvPr id="4" name="操作と狙い">
             <a:extLst xmlns:a="http://schemas.openxmlformats.org/drawingml/2006/main">
               <a:ext uri="{FF2B5EF4-FFF2-40B4-BE49-F238E27FC236}">
-                <a16:creationId xmlns:a16="http://schemas.microsoft.com/office/drawing/2014/main" id="{9800F01B-454C-435A-AC46-0D57A7242104}"/>
+                <a16:creationId xmlns:a16="http://schemas.microsoft.com/office/drawing/2014/main" id="{C7449AA9-3917-4412-9E0B-7783A8E675E5}"/>
               </a:ext>
             </a:extLst>
           </p:cNvPr>
@@ -5648,10 +5000,10 @@
       </p:sp>
       <p:sp>
         <p:nvSpPr>
-          <p:cNvPr id="7" name="噴射で進み、反対向きの噴射で減速。&#10;入力を離しても進むため、止め時を考え">
+          <p:cNvPr id="5" name="噴射で進み、反対向きの噴射で減速。&#10;入力を離しても進むため、止め時を考え">
             <a:extLst xmlns:a="http://schemas.openxmlformats.org/drawingml/2006/main">
               <a:ext uri="{FF2B5EF4-FFF2-40B4-BE49-F238E27FC236}">
-                <a16:creationId xmlns:a16="http://schemas.microsoft.com/office/drawing/2014/main" id="{57B3FD51-BC7D-4D31-AA75-3941B7FCE339}"/>
+                <a16:creationId xmlns:a16="http://schemas.microsoft.com/office/drawing/2014/main" id="{E5B90FBE-381D-4B2E-929C-3118889BDB3E}"/>
               </a:ext>
             </a:extLst>
           </p:cNvPr>
@@ -5837,10 +5189,10 @@
       </p:sp>
       <p:sp>
         <p:nvSpPr>
-          <p:cNvPr id="8" name="想定するプレイヤー">
+          <p:cNvPr id="6" name="想定するプレイヤー">
             <a:extLst xmlns:a="http://schemas.openxmlformats.org/drawingml/2006/main">
               <a:ext uri="{FF2B5EF4-FFF2-40B4-BE49-F238E27FC236}">
-                <a16:creationId xmlns:a16="http://schemas.microsoft.com/office/drawing/2014/main" id="{EF667F20-3E7A-4D45-81D3-17593C48C5F2}"/>
+                <a16:creationId xmlns:a16="http://schemas.microsoft.com/office/drawing/2014/main" id="{733730F1-D7BF-485E-BF37-A347CE6A2CDD}"/>
               </a:ext>
             </a:extLst>
           </p:cNvPr>
@@ -5999,10 +5351,10 @@
       </p:sp>
       <p:sp>
         <p:nvSpPr>
-          <p:cNvPr id="9" name="少ない操作で試行錯誤を楽しみたい人。&#10;微調整して成功する達成感を狙います">
+          <p:cNvPr id="7" name="少ない操作で試行錯誤を楽しみたい人。&#10;微調整して成功する達成感を狙います">
             <a:extLst xmlns:a="http://schemas.openxmlformats.org/drawingml/2006/main">
               <a:ext uri="{FF2B5EF4-FFF2-40B4-BE49-F238E27FC236}">
-                <a16:creationId xmlns:a16="http://schemas.microsoft.com/office/drawing/2014/main" id="{80131DB5-C740-424B-B666-83F959A13FE8}"/>
+                <a16:creationId xmlns:a16="http://schemas.microsoft.com/office/drawing/2014/main" id="{56B2C238-0B04-49F1-8756-E428DE96A571}"/>
               </a:ext>
             </a:extLst>
           </p:cNvPr>
@@ -6189,7 +5541,7 @@
     </p:spTree>
     <p:extLst>
       <p:ext uri="{BB962C8B-B14F-4D97-AF65-F5344CB8AC3E}">
-        <p14:creationId xmlns:p14="http://schemas.microsoft.com/office/powerpoint/2010/main" val="1847979573"/>
+        <p14:creationId xmlns:p14="http://schemas.microsoft.com/office/powerpoint/2010/main" val="1385111879"/>
       </p:ext>
     </p:extLst>
   </p:cSld>
@@ -6217,10 +5569,10 @@
       </p:grpSpPr>
       <p:sp>
         <p:nvSpPr>
-          <p:cNvPr id="11" name="面白さは「いつ減速を始めるか」">
+          <p:cNvPr id="9" name="面白さは「いつ減速を始めるか」">
             <a:extLst xmlns:a="http://schemas.openxmlformats.org/drawingml/2006/main">
               <a:ext uri="{FF2B5EF4-FFF2-40B4-BE49-F238E27FC236}">
-                <a16:creationId xmlns:a16="http://schemas.microsoft.com/office/drawing/2014/main" id="{7C8F31A0-D453-4B3E-B2DB-CA94C4580072}"/>
+                <a16:creationId xmlns:a16="http://schemas.microsoft.com/office/drawing/2014/main" id="{14BC431A-1334-4062-BB50-AAD9C391D266}"/>
               </a:ext>
             </a:extLst>
           </p:cNvPr>
@@ -6382,7 +5734,7 @@
           <p:cNvPr id="2" name="進む方向だけでなく、止まるまでの距離を読む">
             <a:extLst xmlns:a="http://schemas.openxmlformats.org/drawingml/2006/main">
               <a:ext uri="{FF2B5EF4-FFF2-40B4-BE49-F238E27FC236}">
-                <a16:creationId xmlns:a16="http://schemas.microsoft.com/office/drawing/2014/main" id="{361F2669-3D0F-4DB7-87C6-503BC68C779E}"/>
+                <a16:creationId xmlns:a16="http://schemas.microsoft.com/office/drawing/2014/main" id="{E0637432-7B38-477B-AAA6-827D2CAFCE2A}"/>
               </a:ext>
             </a:extLst>
           </p:cNvPr>
@@ -6539,336 +5891,12 @@
           </a:p>
         </p:txBody>
       </p:sp>
-      <p:sp>
-        <p:nvSpPr>
-          <p:cNvPr id="3" name="すべる宇宙駐車場 / 企画書">
+      <p:pic>
+        <p:nvPicPr>
+          <p:cNvPr id="3" name="">
             <a:extLst xmlns:a="http://schemas.openxmlformats.org/drawingml/2006/main">
               <a:ext uri="{FF2B5EF4-FFF2-40B4-BE49-F238E27FC236}">
-                <a16:creationId xmlns:a16="http://schemas.microsoft.com/office/drawing/2014/main" id="{DA050B09-6979-4DB7-9255-274BA8FE096A}"/>
-              </a:ext>
-            </a:extLst>
-          </p:cNvPr>
-          <p:cNvSpPr>
-            <a:spLocks xmlns:a="http://schemas.openxmlformats.org/drawingml/2006/main" noGrp="1"/>
-          </p:cNvSpPr>
-          <p:nvPr/>
-        </p:nvSpPr>
-        <p:spPr>
-          <a:xfrm xmlns:a="http://schemas.openxmlformats.org/drawingml/2006/main">
-            <a:off x="609600" y="6448425"/>
-            <a:ext cx="9525000" cy="247650"/>
-          </a:xfrm>
-          <a:prstGeom xmlns:a="http://schemas.openxmlformats.org/drawingml/2006/main" prst="rect">
-            <a:avLst/>
-          </a:prstGeom>
-          <a:noFill xmlns:a="http://schemas.openxmlformats.org/drawingml/2006/main"/>
-          <a:ln xmlns:a="http://schemas.openxmlformats.org/drawingml/2006/main" w="0">
-            <a:noFill/>
-          </a:ln>
-        </p:spPr>
-        <p:txBody>
-          <a:bodyPr xmlns:a="http://schemas.openxmlformats.org/drawingml/2006/main" wrap="square" lIns="0" tIns="0" rIns="0" bIns="0" anchor="t">
-            <a:noAutofit/>
-          </a:bodyPr>
-          <a:lstStyle xmlns:a="http://schemas.openxmlformats.org/drawingml/2006/main">
-            <a:defPPr>
-              <a:defRPr sz="1200" b="0">
-                <a:solidFill>
-                  <a:srgbClr val="BCCBD0"/>
-                </a:solidFill>
-                <a:latin typeface="Meiryo"/>
-                <a:ea typeface="Meiryo"/>
-                <a:cs typeface="Meiryo"/>
-              </a:defRPr>
-            </a:defPPr>
-            <a:lvl1pPr>
-              <a:defRPr sz="1200" b="0">
-                <a:solidFill>
-                  <a:srgbClr val="BCCBD0"/>
-                </a:solidFill>
-                <a:latin typeface="Meiryo"/>
-                <a:ea typeface="Meiryo"/>
-                <a:cs typeface="Meiryo"/>
-              </a:defRPr>
-            </a:lvl1pPr>
-            <a:lvl2pPr>
-              <a:defRPr sz="1200" b="0">
-                <a:solidFill>
-                  <a:srgbClr val="BCCBD0"/>
-                </a:solidFill>
-                <a:latin typeface="Meiryo"/>
-                <a:ea typeface="Meiryo"/>
-                <a:cs typeface="Meiryo"/>
-              </a:defRPr>
-            </a:lvl2pPr>
-            <a:lvl3pPr>
-              <a:defRPr sz="1200" b="0">
-                <a:solidFill>
-                  <a:srgbClr val="BCCBD0"/>
-                </a:solidFill>
-                <a:latin typeface="Meiryo"/>
-                <a:ea typeface="Meiryo"/>
-                <a:cs typeface="Meiryo"/>
-              </a:defRPr>
-            </a:lvl3pPr>
-            <a:lvl4pPr>
-              <a:defRPr sz="1200" b="0">
-                <a:solidFill>
-                  <a:srgbClr val="BCCBD0"/>
-                </a:solidFill>
-                <a:latin typeface="Meiryo"/>
-                <a:ea typeface="Meiryo"/>
-                <a:cs typeface="Meiryo"/>
-              </a:defRPr>
-            </a:lvl4pPr>
-            <a:lvl5pPr>
-              <a:defRPr sz="1200" b="0">
-                <a:solidFill>
-                  <a:srgbClr val="BCCBD0"/>
-                </a:solidFill>
-                <a:latin typeface="Meiryo"/>
-                <a:ea typeface="Meiryo"/>
-                <a:cs typeface="Meiryo"/>
-              </a:defRPr>
-            </a:lvl5pPr>
-            <a:lvl6pPr>
-              <a:defRPr sz="1200" b="0">
-                <a:solidFill>
-                  <a:srgbClr val="BCCBD0"/>
-                </a:solidFill>
-                <a:latin typeface="Meiryo"/>
-                <a:ea typeface="Meiryo"/>
-                <a:cs typeface="Meiryo"/>
-              </a:defRPr>
-            </a:lvl6pPr>
-            <a:lvl7pPr>
-              <a:defRPr sz="1200" b="0">
-                <a:solidFill>
-                  <a:srgbClr val="BCCBD0"/>
-                </a:solidFill>
-                <a:latin typeface="Meiryo"/>
-                <a:ea typeface="Meiryo"/>
-                <a:cs typeface="Meiryo"/>
-              </a:defRPr>
-            </a:lvl7pPr>
-            <a:lvl8pPr>
-              <a:defRPr sz="1200" b="0">
-                <a:solidFill>
-                  <a:srgbClr val="BCCBD0"/>
-                </a:solidFill>
-                <a:latin typeface="Meiryo"/>
-                <a:ea typeface="Meiryo"/>
-                <a:cs typeface="Meiryo"/>
-              </a:defRPr>
-            </a:lvl8pPr>
-            <a:lvl9pPr>
-              <a:defRPr sz="1200" b="0">
-                <a:solidFill>
-                  <a:srgbClr val="BCCBD0"/>
-                </a:solidFill>
-                <a:latin typeface="Meiryo"/>
-                <a:ea typeface="Meiryo"/>
-                <a:cs typeface="Meiryo"/>
-              </a:defRPr>
-            </a:lvl9pPr>
-          </a:lstStyle>
-          <a:p xmlns:a="http://schemas.openxmlformats.org/drawingml/2006/main">
-            <a:pPr>
-              <a:lnSpc>
-                <a:spcPct val="118000"/>
-              </a:lnSpc>
-              <a:buNone/>
-              <a:defRPr sz="1200" b="0">
-                <a:solidFill>
-                  <a:srgbClr val="BCCBD0"/>
-                </a:solidFill>
-                <a:latin typeface="Meiryo"/>
-                <a:ea typeface="Meiryo"/>
-                <a:cs typeface="Meiryo"/>
-              </a:defRPr>
-            </a:pPr>
-            <a:r>
-              <a:rPr sz="1200" b="0">
-                <a:solidFill>
-                  <a:srgbClr val="BCCBD0"/>
-                </a:solidFill>
-                <a:latin typeface="Meiryo"/>
-                <a:ea typeface="Meiryo"/>
-                <a:cs typeface="Meiryo"/>
-              </a:rPr>
-              <a:t>すべる宇宙駐車場 / 企画書</a:t>
-            </a:r>
-          </a:p>
-        </p:txBody>
-      </p:sp>
-      <p:sp>
-        <p:nvSpPr>
-          <p:cNvPr id="4" name="03 / 06">
-            <a:extLst xmlns:a="http://schemas.openxmlformats.org/drawingml/2006/main">
-              <a:ext uri="{FF2B5EF4-FFF2-40B4-BE49-F238E27FC236}">
-                <a16:creationId xmlns:a16="http://schemas.microsoft.com/office/drawing/2014/main" id="{E7D108A1-4D64-47DD-8A10-BD0D5F25510D}"/>
-              </a:ext>
-            </a:extLst>
-          </p:cNvPr>
-          <p:cNvSpPr>
-            <a:spLocks xmlns:a="http://schemas.openxmlformats.org/drawingml/2006/main" noGrp="1"/>
-          </p:cNvSpPr>
-          <p:nvPr/>
-        </p:nvSpPr>
-        <p:spPr>
-          <a:xfrm xmlns:a="http://schemas.openxmlformats.org/drawingml/2006/main">
-            <a:off x="10668000" y="6448425"/>
-            <a:ext cx="952500" cy="247650"/>
-          </a:xfrm>
-          <a:prstGeom xmlns:a="http://schemas.openxmlformats.org/drawingml/2006/main" prst="rect">
-            <a:avLst/>
-          </a:prstGeom>
-          <a:noFill xmlns:a="http://schemas.openxmlformats.org/drawingml/2006/main"/>
-          <a:ln xmlns:a="http://schemas.openxmlformats.org/drawingml/2006/main" w="0">
-            <a:noFill/>
-          </a:ln>
-        </p:spPr>
-        <p:txBody>
-          <a:bodyPr xmlns:a="http://schemas.openxmlformats.org/drawingml/2006/main" wrap="square" lIns="0" tIns="0" rIns="0" bIns="0" anchor="t">
-            <a:noAutofit/>
-          </a:bodyPr>
-          <a:lstStyle xmlns:a="http://schemas.openxmlformats.org/drawingml/2006/main">
-            <a:defPPr>
-              <a:defRPr sz="1200" b="0">
-                <a:solidFill>
-                  <a:srgbClr val="BCCBD0"/>
-                </a:solidFill>
-                <a:latin typeface="Meiryo"/>
-                <a:ea typeface="Meiryo"/>
-                <a:cs typeface="Meiryo"/>
-              </a:defRPr>
-            </a:defPPr>
-            <a:lvl1pPr>
-              <a:defRPr sz="1200" b="0">
-                <a:solidFill>
-                  <a:srgbClr val="BCCBD0"/>
-                </a:solidFill>
-                <a:latin typeface="Meiryo"/>
-                <a:ea typeface="Meiryo"/>
-                <a:cs typeface="Meiryo"/>
-              </a:defRPr>
-            </a:lvl1pPr>
-            <a:lvl2pPr>
-              <a:defRPr sz="1200" b="0">
-                <a:solidFill>
-                  <a:srgbClr val="BCCBD0"/>
-                </a:solidFill>
-                <a:latin typeface="Meiryo"/>
-                <a:ea typeface="Meiryo"/>
-                <a:cs typeface="Meiryo"/>
-              </a:defRPr>
-            </a:lvl2pPr>
-            <a:lvl3pPr>
-              <a:defRPr sz="1200" b="0">
-                <a:solidFill>
-                  <a:srgbClr val="BCCBD0"/>
-                </a:solidFill>
-                <a:latin typeface="Meiryo"/>
-                <a:ea typeface="Meiryo"/>
-                <a:cs typeface="Meiryo"/>
-              </a:defRPr>
-            </a:lvl3pPr>
-            <a:lvl4pPr>
-              <a:defRPr sz="1200" b="0">
-                <a:solidFill>
-                  <a:srgbClr val="BCCBD0"/>
-                </a:solidFill>
-                <a:latin typeface="Meiryo"/>
-                <a:ea typeface="Meiryo"/>
-                <a:cs typeface="Meiryo"/>
-              </a:defRPr>
-            </a:lvl4pPr>
-            <a:lvl5pPr>
-              <a:defRPr sz="1200" b="0">
-                <a:solidFill>
-                  <a:srgbClr val="BCCBD0"/>
-                </a:solidFill>
-                <a:latin typeface="Meiryo"/>
-                <a:ea typeface="Meiryo"/>
-                <a:cs typeface="Meiryo"/>
-              </a:defRPr>
-            </a:lvl5pPr>
-            <a:lvl6pPr>
-              <a:defRPr sz="1200" b="0">
-                <a:solidFill>
-                  <a:srgbClr val="BCCBD0"/>
-                </a:solidFill>
-                <a:latin typeface="Meiryo"/>
-                <a:ea typeface="Meiryo"/>
-                <a:cs typeface="Meiryo"/>
-              </a:defRPr>
-            </a:lvl6pPr>
-            <a:lvl7pPr>
-              <a:defRPr sz="1200" b="0">
-                <a:solidFill>
-                  <a:srgbClr val="BCCBD0"/>
-                </a:solidFill>
-                <a:latin typeface="Meiryo"/>
-                <a:ea typeface="Meiryo"/>
-                <a:cs typeface="Meiryo"/>
-              </a:defRPr>
-            </a:lvl7pPr>
-            <a:lvl8pPr>
-              <a:defRPr sz="1200" b="0">
-                <a:solidFill>
-                  <a:srgbClr val="BCCBD0"/>
-                </a:solidFill>
-                <a:latin typeface="Meiryo"/>
-                <a:ea typeface="Meiryo"/>
-                <a:cs typeface="Meiryo"/>
-              </a:defRPr>
-            </a:lvl8pPr>
-            <a:lvl9pPr>
-              <a:defRPr sz="1200" b="0">
-                <a:solidFill>
-                  <a:srgbClr val="BCCBD0"/>
-                </a:solidFill>
-                <a:latin typeface="Meiryo"/>
-                <a:ea typeface="Meiryo"/>
-                <a:cs typeface="Meiryo"/>
-              </a:defRPr>
-            </a:lvl9pPr>
-          </a:lstStyle>
-          <a:p xmlns:a="http://schemas.openxmlformats.org/drawingml/2006/main">
-            <a:pPr>
-              <a:lnSpc>
-                <a:spcPct val="118000"/>
-              </a:lnSpc>
-              <a:buNone/>
-              <a:defRPr sz="1200" b="0">
-                <a:solidFill>
-                  <a:srgbClr val="BCCBD0"/>
-                </a:solidFill>
-                <a:latin typeface="Meiryo"/>
-                <a:ea typeface="Meiryo"/>
-                <a:cs typeface="Meiryo"/>
-              </a:defRPr>
-            </a:pPr>
-            <a:r>
-              <a:rPr sz="1200" b="0">
-                <a:solidFill>
-                  <a:srgbClr val="BCCBD0"/>
-                </a:solidFill>
-                <a:latin typeface="Meiryo"/>
-                <a:ea typeface="Meiryo"/>
-                <a:cs typeface="Meiryo"/>
-              </a:rPr>
-              <a:t>03 / 06</a:t>
-            </a:r>
-          </a:p>
-        </p:txBody>
-      </p:sp>
-      <p:pic>
-        <p:nvPicPr>
-          <p:cNvPr id="5" name="">
-            <a:extLst xmlns:a="http://schemas.openxmlformats.org/drawingml/2006/main">
-              <a:ext uri="{FF2B5EF4-FFF2-40B4-BE49-F238E27FC236}">
-                <a16:creationId xmlns:a16="http://schemas.microsoft.com/office/drawing/2014/main" id="{2154198A-C413-4863-9539-8D8E75259C03}"/>
+                <a16:creationId xmlns:a16="http://schemas.microsoft.com/office/drawing/2014/main" id="{BFB0E6AF-7097-4D83-B986-126BD885D7C4}"/>
               </a:ext>
             </a:extLst>
           </p:cNvPr>
@@ -6878,7 +5906,7 @@
           <p:nvPr/>
         </p:nvPicPr>
         <p:blipFill>
-          <a:blip xmlns:r="http://schemas.openxmlformats.org/officeDocument/2006/relationships" xmlns:a="http://schemas.openxmlformats.org/drawingml/2006/main" r:embed="Rf89be80c7ec84fe3"/>
+          <a:blip xmlns:r="http://schemas.openxmlformats.org/officeDocument/2006/relationships" xmlns:a="http://schemas.openxmlformats.org/drawingml/2006/main" r:embed="Rc6bbbafc76c44d4b"/>
           <a:stretch xmlns:a="http://schemas.openxmlformats.org/drawingml/2006/main"/>
         </p:blipFill>
         <p:spPr>
@@ -6893,10 +5921,10 @@
       </p:pic>
       <p:sp>
         <p:nvSpPr>
-          <p:cNvPr id="6" name="枠が近づいてからでは、行き過ぎる">
+          <p:cNvPr id="4" name="枠が近づいてからでは、行き過ぎる">
             <a:extLst xmlns:a="http://schemas.openxmlformats.org/drawingml/2006/main">
               <a:ext uri="{FF2B5EF4-FFF2-40B4-BE49-F238E27FC236}">
-                <a16:creationId xmlns:a16="http://schemas.microsoft.com/office/drawing/2014/main" id="{AFDD4451-0979-4496-B46E-8D84CC1A8CC7}"/>
+                <a16:creationId xmlns:a16="http://schemas.microsoft.com/office/drawing/2014/main" id="{A2ECCEA2-A79C-480C-A7C4-1DC5DB8DDFF9}"/>
               </a:ext>
             </a:extLst>
           </p:cNvPr>
@@ -7055,10 +6083,10 @@
       </p:sp>
       <p:sp>
         <p:nvSpPr>
-          <p:cNvPr id="7" name="勢いをつけすぎると、逆噴射してもすぐには止まらない。&#10;少し手前で減速し、">
+          <p:cNvPr id="5" name="勢いをつけすぎると、逆噴射してもすぐには止まらない。&#10;少し手前で減速し、">
             <a:extLst xmlns:a="http://schemas.openxmlformats.org/drawingml/2006/main">
               <a:ext uri="{FF2B5EF4-FFF2-40B4-BE49-F238E27FC236}">
-                <a16:creationId xmlns:a16="http://schemas.microsoft.com/office/drawing/2014/main" id="{1CFAD7E3-2986-485F-978E-1DC54DA11B9F}"/>
+                <a16:creationId xmlns:a16="http://schemas.microsoft.com/office/drawing/2014/main" id="{7D8D881E-BB0A-4498-8499-D386BE5751AC}"/>
               </a:ext>
             </a:extLst>
           </p:cNvPr>
@@ -7244,10 +6272,10 @@
       </p:sp>
       <p:sp>
         <p:nvSpPr>
-          <p:cNvPr id="8" name="失敗から次の操作を考えられる">
+          <p:cNvPr id="6" name="失敗から次の操作を考えられる">
             <a:extLst xmlns:a="http://schemas.openxmlformats.org/drawingml/2006/main">
               <a:ext uri="{FF2B5EF4-FFF2-40B4-BE49-F238E27FC236}">
-                <a16:creationId xmlns:a16="http://schemas.microsoft.com/office/drawing/2014/main" id="{073747B0-4F2C-4AAA-A7BD-368B93D66150}"/>
+                <a16:creationId xmlns:a16="http://schemas.microsoft.com/office/drawing/2014/main" id="{3BFDD4A6-5E0F-4F27-83C4-7387EE140042}"/>
               </a:ext>
             </a:extLst>
           </p:cNvPr>
@@ -7406,10 +6434,10 @@
       </p:sp>
       <p:sp>
         <p:nvSpPr>
-          <p:cNvPr id="9" name="行き過ぎたら、次は早めに逆噴射。&#10;止まりすぎたら、少しだけ噴射を足す。&#10;">
+          <p:cNvPr id="7" name="行き過ぎたら、次は早めに逆噴射。&#10;止まりすぎたら、少しだけ噴射を足す。&#10;">
             <a:extLst xmlns:a="http://schemas.openxmlformats.org/drawingml/2006/main">
               <a:ext uri="{FF2B5EF4-FFF2-40B4-BE49-F238E27FC236}">
-                <a16:creationId xmlns:a16="http://schemas.microsoft.com/office/drawing/2014/main" id="{208882C1-8443-4C4D-A925-BD96BAC0DCF1}"/>
+                <a16:creationId xmlns:a16="http://schemas.microsoft.com/office/drawing/2014/main" id="{996E866B-E8E3-4A59-9466-49D8B4721267}"/>
               </a:ext>
             </a:extLst>
           </p:cNvPr>
@@ -7622,10 +6650,10 @@
       </p:sp>
       <p:sp>
         <p:nvSpPr>
-          <p:cNvPr id="10" name="狙った枠に収まった瞬間、「自分で止めた」と感じられる設計。">
+          <p:cNvPr id="8" name="狙った枠に収まった瞬間、「自分で止めた」と感じられる設計。">
             <a:extLst xmlns:a="http://schemas.openxmlformats.org/drawingml/2006/main">
               <a:ext uri="{FF2B5EF4-FFF2-40B4-BE49-F238E27FC236}">
-                <a16:creationId xmlns:a16="http://schemas.microsoft.com/office/drawing/2014/main" id="{7873E285-6673-4D06-BFB6-87753145D5C9}"/>
+                <a16:creationId xmlns:a16="http://schemas.microsoft.com/office/drawing/2014/main" id="{19E56FA0-B066-4CD2-A401-3649D87D99DC}"/>
               </a:ext>
             </a:extLst>
           </p:cNvPr>
@@ -7785,7 +6813,7 @@
     </p:spTree>
     <p:extLst>
       <p:ext uri="{BB962C8B-B14F-4D97-AF65-F5344CB8AC3E}">
-        <p14:creationId xmlns:p14="http://schemas.microsoft.com/office/powerpoint/2010/main" val="274372452"/>
+        <p14:creationId xmlns:p14="http://schemas.microsoft.com/office/powerpoint/2010/main" val="1878842600"/>
       </p:ext>
     </p:extLst>
   </p:cSld>
@@ -7813,10 +6841,10 @@
       </p:grpSpPr>
       <p:sp>
         <p:nvSpPr>
-          <p:cNvPr id="10" name="宇宙の駐車場で、進路とタイミングを読む">
+          <p:cNvPr id="8" name="宇宙の駐車場で、進路とタイミングを読む">
             <a:extLst xmlns:a="http://schemas.openxmlformats.org/drawingml/2006/main">
               <a:ext uri="{FF2B5EF4-FFF2-40B4-BE49-F238E27FC236}">
-                <a16:creationId xmlns:a16="http://schemas.microsoft.com/office/drawing/2014/main" id="{F2155553-ACA8-4C81-AE2A-17AAC1402049}"/>
+                <a16:creationId xmlns:a16="http://schemas.microsoft.com/office/drawing/2014/main" id="{BBE66BCC-5549-49BE-B825-3BAA4C259595}"/>
               </a:ext>
             </a:extLst>
           </p:cNvPr>
@@ -7978,7 +7006,7 @@
           <p:cNvPr id="2" name="ドット絵の船と立体的な空間で、宇宙らしい浮遊感を表現">
             <a:extLst xmlns:a="http://schemas.openxmlformats.org/drawingml/2006/main">
               <a:ext uri="{FF2B5EF4-FFF2-40B4-BE49-F238E27FC236}">
-                <a16:creationId xmlns:a16="http://schemas.microsoft.com/office/drawing/2014/main" id="{C65B2B4E-48AC-4AD9-AB06-CBC378561F8E}"/>
+                <a16:creationId xmlns:a16="http://schemas.microsoft.com/office/drawing/2014/main" id="{35BAAC2C-F6D4-4868-95E8-A664F51F0F57}"/>
               </a:ext>
             </a:extLst>
           </p:cNvPr>
@@ -8135,336 +7163,12 @@
           </a:p>
         </p:txBody>
       </p:sp>
-      <p:sp>
-        <p:nvSpPr>
-          <p:cNvPr id="3" name="すべる宇宙駐車場 / 企画書">
+      <p:pic>
+        <p:nvPicPr>
+          <p:cNvPr id="3" name="">
             <a:extLst xmlns:a="http://schemas.openxmlformats.org/drawingml/2006/main">
               <a:ext uri="{FF2B5EF4-FFF2-40B4-BE49-F238E27FC236}">
-                <a16:creationId xmlns:a16="http://schemas.microsoft.com/office/drawing/2014/main" id="{250528DA-1DA6-4493-B447-018E327F5A80}"/>
-              </a:ext>
-            </a:extLst>
-          </p:cNvPr>
-          <p:cNvSpPr>
-            <a:spLocks xmlns:a="http://schemas.openxmlformats.org/drawingml/2006/main" noGrp="1"/>
-          </p:cNvSpPr>
-          <p:nvPr/>
-        </p:nvSpPr>
-        <p:spPr>
-          <a:xfrm xmlns:a="http://schemas.openxmlformats.org/drawingml/2006/main">
-            <a:off x="609600" y="6448425"/>
-            <a:ext cx="9525000" cy="247650"/>
-          </a:xfrm>
-          <a:prstGeom xmlns:a="http://schemas.openxmlformats.org/drawingml/2006/main" prst="rect">
-            <a:avLst/>
-          </a:prstGeom>
-          <a:noFill xmlns:a="http://schemas.openxmlformats.org/drawingml/2006/main"/>
-          <a:ln xmlns:a="http://schemas.openxmlformats.org/drawingml/2006/main" w="0">
-            <a:noFill/>
-          </a:ln>
-        </p:spPr>
-        <p:txBody>
-          <a:bodyPr xmlns:a="http://schemas.openxmlformats.org/drawingml/2006/main" wrap="square" lIns="0" tIns="0" rIns="0" bIns="0" anchor="t">
-            <a:noAutofit/>
-          </a:bodyPr>
-          <a:lstStyle xmlns:a="http://schemas.openxmlformats.org/drawingml/2006/main">
-            <a:defPPr>
-              <a:defRPr sz="1200" b="0">
-                <a:solidFill>
-                  <a:srgbClr val="BCCBD0"/>
-                </a:solidFill>
-                <a:latin typeface="Meiryo"/>
-                <a:ea typeface="Meiryo"/>
-                <a:cs typeface="Meiryo"/>
-              </a:defRPr>
-            </a:defPPr>
-            <a:lvl1pPr>
-              <a:defRPr sz="1200" b="0">
-                <a:solidFill>
-                  <a:srgbClr val="BCCBD0"/>
-                </a:solidFill>
-                <a:latin typeface="Meiryo"/>
-                <a:ea typeface="Meiryo"/>
-                <a:cs typeface="Meiryo"/>
-              </a:defRPr>
-            </a:lvl1pPr>
-            <a:lvl2pPr>
-              <a:defRPr sz="1200" b="0">
-                <a:solidFill>
-                  <a:srgbClr val="BCCBD0"/>
-                </a:solidFill>
-                <a:latin typeface="Meiryo"/>
-                <a:ea typeface="Meiryo"/>
-                <a:cs typeface="Meiryo"/>
-              </a:defRPr>
-            </a:lvl2pPr>
-            <a:lvl3pPr>
-              <a:defRPr sz="1200" b="0">
-                <a:solidFill>
-                  <a:srgbClr val="BCCBD0"/>
-                </a:solidFill>
-                <a:latin typeface="Meiryo"/>
-                <a:ea typeface="Meiryo"/>
-                <a:cs typeface="Meiryo"/>
-              </a:defRPr>
-            </a:lvl3pPr>
-            <a:lvl4pPr>
-              <a:defRPr sz="1200" b="0">
-                <a:solidFill>
-                  <a:srgbClr val="BCCBD0"/>
-                </a:solidFill>
-                <a:latin typeface="Meiryo"/>
-                <a:ea typeface="Meiryo"/>
-                <a:cs typeface="Meiryo"/>
-              </a:defRPr>
-            </a:lvl4pPr>
-            <a:lvl5pPr>
-              <a:defRPr sz="1200" b="0">
-                <a:solidFill>
-                  <a:srgbClr val="BCCBD0"/>
-                </a:solidFill>
-                <a:latin typeface="Meiryo"/>
-                <a:ea typeface="Meiryo"/>
-                <a:cs typeface="Meiryo"/>
-              </a:defRPr>
-            </a:lvl5pPr>
-            <a:lvl6pPr>
-              <a:defRPr sz="1200" b="0">
-                <a:solidFill>
-                  <a:srgbClr val="BCCBD0"/>
-                </a:solidFill>
-                <a:latin typeface="Meiryo"/>
-                <a:ea typeface="Meiryo"/>
-                <a:cs typeface="Meiryo"/>
-              </a:defRPr>
-            </a:lvl6pPr>
-            <a:lvl7pPr>
-              <a:defRPr sz="1200" b="0">
-                <a:solidFill>
-                  <a:srgbClr val="BCCBD0"/>
-                </a:solidFill>
-                <a:latin typeface="Meiryo"/>
-                <a:ea typeface="Meiryo"/>
-                <a:cs typeface="Meiryo"/>
-              </a:defRPr>
-            </a:lvl7pPr>
-            <a:lvl8pPr>
-              <a:defRPr sz="1200" b="0">
-                <a:solidFill>
-                  <a:srgbClr val="BCCBD0"/>
-                </a:solidFill>
-                <a:latin typeface="Meiryo"/>
-                <a:ea typeface="Meiryo"/>
-                <a:cs typeface="Meiryo"/>
-              </a:defRPr>
-            </a:lvl8pPr>
-            <a:lvl9pPr>
-              <a:defRPr sz="1200" b="0">
-                <a:solidFill>
-                  <a:srgbClr val="BCCBD0"/>
-                </a:solidFill>
-                <a:latin typeface="Meiryo"/>
-                <a:ea typeface="Meiryo"/>
-                <a:cs typeface="Meiryo"/>
-              </a:defRPr>
-            </a:lvl9pPr>
-          </a:lstStyle>
-          <a:p xmlns:a="http://schemas.openxmlformats.org/drawingml/2006/main">
-            <a:pPr>
-              <a:lnSpc>
-                <a:spcPct val="118000"/>
-              </a:lnSpc>
-              <a:buNone/>
-              <a:defRPr sz="1200" b="0">
-                <a:solidFill>
-                  <a:srgbClr val="BCCBD0"/>
-                </a:solidFill>
-                <a:latin typeface="Meiryo"/>
-                <a:ea typeface="Meiryo"/>
-                <a:cs typeface="Meiryo"/>
-              </a:defRPr>
-            </a:pPr>
-            <a:r>
-              <a:rPr sz="1200" b="0">
-                <a:solidFill>
-                  <a:srgbClr val="BCCBD0"/>
-                </a:solidFill>
-                <a:latin typeface="Meiryo"/>
-                <a:ea typeface="Meiryo"/>
-                <a:cs typeface="Meiryo"/>
-              </a:rPr>
-              <a:t>すべる宇宙駐車場 / 企画書</a:t>
-            </a:r>
-          </a:p>
-        </p:txBody>
-      </p:sp>
-      <p:sp>
-        <p:nvSpPr>
-          <p:cNvPr id="4" name="04 / 06">
-            <a:extLst xmlns:a="http://schemas.openxmlformats.org/drawingml/2006/main">
-              <a:ext uri="{FF2B5EF4-FFF2-40B4-BE49-F238E27FC236}">
-                <a16:creationId xmlns:a16="http://schemas.microsoft.com/office/drawing/2014/main" id="{7A4A7DD3-B844-4D20-AD2A-0097192B9A8B}"/>
-              </a:ext>
-            </a:extLst>
-          </p:cNvPr>
-          <p:cNvSpPr>
-            <a:spLocks xmlns:a="http://schemas.openxmlformats.org/drawingml/2006/main" noGrp="1"/>
-          </p:cNvSpPr>
-          <p:nvPr/>
-        </p:nvSpPr>
-        <p:spPr>
-          <a:xfrm xmlns:a="http://schemas.openxmlformats.org/drawingml/2006/main">
-            <a:off x="10668000" y="6448425"/>
-            <a:ext cx="952500" cy="247650"/>
-          </a:xfrm>
-          <a:prstGeom xmlns:a="http://schemas.openxmlformats.org/drawingml/2006/main" prst="rect">
-            <a:avLst/>
-          </a:prstGeom>
-          <a:noFill xmlns:a="http://schemas.openxmlformats.org/drawingml/2006/main"/>
-          <a:ln xmlns:a="http://schemas.openxmlformats.org/drawingml/2006/main" w="0">
-            <a:noFill/>
-          </a:ln>
-        </p:spPr>
-        <p:txBody>
-          <a:bodyPr xmlns:a="http://schemas.openxmlformats.org/drawingml/2006/main" wrap="square" lIns="0" tIns="0" rIns="0" bIns="0" anchor="t">
-            <a:noAutofit/>
-          </a:bodyPr>
-          <a:lstStyle xmlns:a="http://schemas.openxmlformats.org/drawingml/2006/main">
-            <a:defPPr>
-              <a:defRPr sz="1200" b="0">
-                <a:solidFill>
-                  <a:srgbClr val="BCCBD0"/>
-                </a:solidFill>
-                <a:latin typeface="Meiryo"/>
-                <a:ea typeface="Meiryo"/>
-                <a:cs typeface="Meiryo"/>
-              </a:defRPr>
-            </a:defPPr>
-            <a:lvl1pPr>
-              <a:defRPr sz="1200" b="0">
-                <a:solidFill>
-                  <a:srgbClr val="BCCBD0"/>
-                </a:solidFill>
-                <a:latin typeface="Meiryo"/>
-                <a:ea typeface="Meiryo"/>
-                <a:cs typeface="Meiryo"/>
-              </a:defRPr>
-            </a:lvl1pPr>
-            <a:lvl2pPr>
-              <a:defRPr sz="1200" b="0">
-                <a:solidFill>
-                  <a:srgbClr val="BCCBD0"/>
-                </a:solidFill>
-                <a:latin typeface="Meiryo"/>
-                <a:ea typeface="Meiryo"/>
-                <a:cs typeface="Meiryo"/>
-              </a:defRPr>
-            </a:lvl2pPr>
-            <a:lvl3pPr>
-              <a:defRPr sz="1200" b="0">
-                <a:solidFill>
-                  <a:srgbClr val="BCCBD0"/>
-                </a:solidFill>
-                <a:latin typeface="Meiryo"/>
-                <a:ea typeface="Meiryo"/>
-                <a:cs typeface="Meiryo"/>
-              </a:defRPr>
-            </a:lvl3pPr>
-            <a:lvl4pPr>
-              <a:defRPr sz="1200" b="0">
-                <a:solidFill>
-                  <a:srgbClr val="BCCBD0"/>
-                </a:solidFill>
-                <a:latin typeface="Meiryo"/>
-                <a:ea typeface="Meiryo"/>
-                <a:cs typeface="Meiryo"/>
-              </a:defRPr>
-            </a:lvl4pPr>
-            <a:lvl5pPr>
-              <a:defRPr sz="1200" b="0">
-                <a:solidFill>
-                  <a:srgbClr val="BCCBD0"/>
-                </a:solidFill>
-                <a:latin typeface="Meiryo"/>
-                <a:ea typeface="Meiryo"/>
-                <a:cs typeface="Meiryo"/>
-              </a:defRPr>
-            </a:lvl5pPr>
-            <a:lvl6pPr>
-              <a:defRPr sz="1200" b="0">
-                <a:solidFill>
-                  <a:srgbClr val="BCCBD0"/>
-                </a:solidFill>
-                <a:latin typeface="Meiryo"/>
-                <a:ea typeface="Meiryo"/>
-                <a:cs typeface="Meiryo"/>
-              </a:defRPr>
-            </a:lvl6pPr>
-            <a:lvl7pPr>
-              <a:defRPr sz="1200" b="0">
-                <a:solidFill>
-                  <a:srgbClr val="BCCBD0"/>
-                </a:solidFill>
-                <a:latin typeface="Meiryo"/>
-                <a:ea typeface="Meiryo"/>
-                <a:cs typeface="Meiryo"/>
-              </a:defRPr>
-            </a:lvl7pPr>
-            <a:lvl8pPr>
-              <a:defRPr sz="1200" b="0">
-                <a:solidFill>
-                  <a:srgbClr val="BCCBD0"/>
-                </a:solidFill>
-                <a:latin typeface="Meiryo"/>
-                <a:ea typeface="Meiryo"/>
-                <a:cs typeface="Meiryo"/>
-              </a:defRPr>
-            </a:lvl8pPr>
-            <a:lvl9pPr>
-              <a:defRPr sz="1200" b="0">
-                <a:solidFill>
-                  <a:srgbClr val="BCCBD0"/>
-                </a:solidFill>
-                <a:latin typeface="Meiryo"/>
-                <a:ea typeface="Meiryo"/>
-                <a:cs typeface="Meiryo"/>
-              </a:defRPr>
-            </a:lvl9pPr>
-          </a:lstStyle>
-          <a:p xmlns:a="http://schemas.openxmlformats.org/drawingml/2006/main">
-            <a:pPr>
-              <a:lnSpc>
-                <a:spcPct val="118000"/>
-              </a:lnSpc>
-              <a:buNone/>
-              <a:defRPr sz="1200" b="0">
-                <a:solidFill>
-                  <a:srgbClr val="BCCBD0"/>
-                </a:solidFill>
-                <a:latin typeface="Meiryo"/>
-                <a:ea typeface="Meiryo"/>
-                <a:cs typeface="Meiryo"/>
-              </a:defRPr>
-            </a:pPr>
-            <a:r>
-              <a:rPr sz="1200" b="0">
-                <a:solidFill>
-                  <a:srgbClr val="BCCBD0"/>
-                </a:solidFill>
-                <a:latin typeface="Meiryo"/>
-                <a:ea typeface="Meiryo"/>
-                <a:cs typeface="Meiryo"/>
-              </a:rPr>
-              <a:t>04 / 06</a:t>
-            </a:r>
-          </a:p>
-        </p:txBody>
-      </p:sp>
-      <p:pic>
-        <p:nvPicPr>
-          <p:cNvPr id="5" name="">
-            <a:extLst xmlns:a="http://schemas.openxmlformats.org/drawingml/2006/main">
-              <a:ext uri="{FF2B5EF4-FFF2-40B4-BE49-F238E27FC236}">
-                <a16:creationId xmlns:a16="http://schemas.microsoft.com/office/drawing/2014/main" id="{3C3A1070-5EC8-42D1-8B30-2DF01D661630}"/>
+                <a16:creationId xmlns:a16="http://schemas.microsoft.com/office/drawing/2014/main" id="{4AE62863-F93F-4EE1-8F95-3E8289D2662F}"/>
               </a:ext>
             </a:extLst>
           </p:cNvPr>
@@ -8474,7 +7178,7 @@
           <p:nvPr/>
         </p:nvPicPr>
         <p:blipFill>
-          <a:blip xmlns:r="http://schemas.openxmlformats.org/officeDocument/2006/relationships" xmlns:a="http://schemas.openxmlformats.org/drawingml/2006/main" r:embed="R4b7444b6e90243e4"/>
+          <a:blip xmlns:r="http://schemas.openxmlformats.org/officeDocument/2006/relationships" xmlns:a="http://schemas.openxmlformats.org/drawingml/2006/main" r:embed="R0fb47aa17e344098"/>
           <a:stretch xmlns:a="http://schemas.openxmlformats.org/drawingml/2006/main"/>
         </p:blipFill>
         <p:spPr>
@@ -8489,10 +7193,10 @@
       </p:pic>
       <p:sp>
         <p:nvSpPr>
-          <p:cNvPr id="6" name="障害物のあるコース">
+          <p:cNvPr id="4" name="障害物のあるコース">
             <a:extLst xmlns:a="http://schemas.openxmlformats.org/drawingml/2006/main">
               <a:ext uri="{FF2B5EF4-FFF2-40B4-BE49-F238E27FC236}">
-                <a16:creationId xmlns:a16="http://schemas.microsoft.com/office/drawing/2014/main" id="{3015DD46-FF0C-48E2-94EC-AF38C0F9A563}"/>
+                <a16:creationId xmlns:a16="http://schemas.microsoft.com/office/drawing/2014/main" id="{4C6C5EDF-13C3-48D5-A98D-89C4796B43EC}"/>
               </a:ext>
             </a:extLst>
           </p:cNvPr>
@@ -8651,10 +7355,10 @@
       </p:sp>
       <p:sp>
         <p:nvSpPr>
-          <p:cNvPr id="7" name="曲がる前に減速し、次の進路を整える。&#10;通路の形で噴射の使い方が変わります">
+          <p:cNvPr id="5" name="曲がる前に減速し、次の進路を整える。&#10;通路の形で噴射の使い方が変わります">
             <a:extLst xmlns:a="http://schemas.openxmlformats.org/drawingml/2006/main">
               <a:ext uri="{FF2B5EF4-FFF2-40B4-BE49-F238E27FC236}">
-                <a16:creationId xmlns:a16="http://schemas.microsoft.com/office/drawing/2014/main" id="{061B15F2-0C5A-48DB-93B3-1E1AE42B3238}"/>
+                <a16:creationId xmlns:a16="http://schemas.microsoft.com/office/drawing/2014/main" id="{28C5C1DC-2FF5-42F9-85E6-86E7FA79C4E0}"/>
               </a:ext>
             </a:extLst>
           </p:cNvPr>
@@ -8840,10 +7544,10 @@
       </p:sp>
       <p:sp>
         <p:nvSpPr>
-          <p:cNvPr id="8" name="隕石の予告">
+          <p:cNvPr id="6" name="隕石の予告">
             <a:extLst xmlns:a="http://schemas.openxmlformats.org/drawingml/2006/main">
               <a:ext uri="{FF2B5EF4-FFF2-40B4-BE49-F238E27FC236}">
-                <a16:creationId xmlns:a16="http://schemas.microsoft.com/office/drawing/2014/main" id="{DBBE8E20-CC82-4406-897B-4254AF601C0B}"/>
+                <a16:creationId xmlns:a16="http://schemas.microsoft.com/office/drawing/2014/main" id="{BE4E483B-1810-4D0E-9E93-9A8663F887A2}"/>
               </a:ext>
             </a:extLst>
           </p:cNvPr>
@@ -9002,10 +7706,10 @@
       </p:sp>
       <p:sp>
         <p:nvSpPr>
-          <p:cNvPr id="9" name="進む先の危険を見て、待つか進むか判断。&#10;慣性の操作にタイミングの緊張感を">
+          <p:cNvPr id="7" name="進む先の危険を見て、待つか進むか判断。&#10;慣性の操作にタイミングの緊張感を">
             <a:extLst xmlns:a="http://schemas.openxmlformats.org/drawingml/2006/main">
               <a:ext uri="{FF2B5EF4-FFF2-40B4-BE49-F238E27FC236}">
-                <a16:creationId xmlns:a16="http://schemas.microsoft.com/office/drawing/2014/main" id="{D426DD56-E312-4453-86C5-D4073C673A8F}"/>
+                <a16:creationId xmlns:a16="http://schemas.microsoft.com/office/drawing/2014/main" id="{1E11047B-ECE7-408F-934F-DBC6BA8A7C09}"/>
               </a:ext>
             </a:extLst>
           </p:cNvPr>
@@ -9192,7 +7896,7 @@
     </p:spTree>
     <p:extLst>
       <p:ext uri="{BB962C8B-B14F-4D97-AF65-F5344CB8AC3E}">
-        <p14:creationId xmlns:p14="http://schemas.microsoft.com/office/powerpoint/2010/main" val="1577852992"/>
+        <p14:creationId xmlns:p14="http://schemas.microsoft.com/office/powerpoint/2010/main" val="399315797"/>
       </p:ext>
     </p:extLst>
   </p:cSld>
@@ -9220,10 +7924,10 @@
       </p:grpSpPr>
       <p:sp>
         <p:nvSpPr>
-          <p:cNvPr id="11" name="クリアの次は、もっと少ない噴射で">
+          <p:cNvPr id="9" name="クリアの次は、もっと少ない噴射で">
             <a:extLst xmlns:a="http://schemas.openxmlformats.org/drawingml/2006/main">
               <a:ext uri="{FF2B5EF4-FFF2-40B4-BE49-F238E27FC236}">
-                <a16:creationId xmlns:a16="http://schemas.microsoft.com/office/drawing/2014/main" id="{F9FA4FF9-8B19-4469-AE05-4A8C4E5B827B}"/>
+                <a16:creationId xmlns:a16="http://schemas.microsoft.com/office/drawing/2014/main" id="{BE156E49-7452-4B91-A305-FEEF639B60A7}"/>
               </a:ext>
             </a:extLst>
           </p:cNvPr>
@@ -9385,7 +8089,7 @@
           <p:cNvPr id="2" name="記録を見比べ、操作の上達を実感する">
             <a:extLst xmlns:a="http://schemas.openxmlformats.org/drawingml/2006/main">
               <a:ext uri="{FF2B5EF4-FFF2-40B4-BE49-F238E27FC236}">
-                <a16:creationId xmlns:a16="http://schemas.microsoft.com/office/drawing/2014/main" id="{9EFF3DC4-DE13-4C88-985A-55CACD76D902}"/>
+                <a16:creationId xmlns:a16="http://schemas.microsoft.com/office/drawing/2014/main" id="{AE7D5C97-B144-4D34-B28E-19BCB860F0F7}"/>
               </a:ext>
             </a:extLst>
           </p:cNvPr>
@@ -9542,336 +8246,12 @@
           </a:p>
         </p:txBody>
       </p:sp>
-      <p:sp>
-        <p:nvSpPr>
-          <p:cNvPr id="3" name="すべる宇宙駐車場 / 企画書">
+      <p:pic>
+        <p:nvPicPr>
+          <p:cNvPr id="3" name="">
             <a:extLst xmlns:a="http://schemas.openxmlformats.org/drawingml/2006/main">
               <a:ext uri="{FF2B5EF4-FFF2-40B4-BE49-F238E27FC236}">
-                <a16:creationId xmlns:a16="http://schemas.microsoft.com/office/drawing/2014/main" id="{80DDBF57-EF62-4318-A83C-BC7027D6614C}"/>
-              </a:ext>
-            </a:extLst>
-          </p:cNvPr>
-          <p:cNvSpPr>
-            <a:spLocks xmlns:a="http://schemas.openxmlformats.org/drawingml/2006/main" noGrp="1"/>
-          </p:cNvSpPr>
-          <p:nvPr/>
-        </p:nvSpPr>
-        <p:spPr>
-          <a:xfrm xmlns:a="http://schemas.openxmlformats.org/drawingml/2006/main">
-            <a:off x="609600" y="6448425"/>
-            <a:ext cx="9525000" cy="247650"/>
-          </a:xfrm>
-          <a:prstGeom xmlns:a="http://schemas.openxmlformats.org/drawingml/2006/main" prst="rect">
-            <a:avLst/>
-          </a:prstGeom>
-          <a:noFill xmlns:a="http://schemas.openxmlformats.org/drawingml/2006/main"/>
-          <a:ln xmlns:a="http://schemas.openxmlformats.org/drawingml/2006/main" w="0">
-            <a:noFill/>
-          </a:ln>
-        </p:spPr>
-        <p:txBody>
-          <a:bodyPr xmlns:a="http://schemas.openxmlformats.org/drawingml/2006/main" wrap="square" lIns="0" tIns="0" rIns="0" bIns="0" anchor="t">
-            <a:noAutofit/>
-          </a:bodyPr>
-          <a:lstStyle xmlns:a="http://schemas.openxmlformats.org/drawingml/2006/main">
-            <a:defPPr>
-              <a:defRPr sz="1200" b="0">
-                <a:solidFill>
-                  <a:srgbClr val="BCCBD0"/>
-                </a:solidFill>
-                <a:latin typeface="Meiryo"/>
-                <a:ea typeface="Meiryo"/>
-                <a:cs typeface="Meiryo"/>
-              </a:defRPr>
-            </a:defPPr>
-            <a:lvl1pPr>
-              <a:defRPr sz="1200" b="0">
-                <a:solidFill>
-                  <a:srgbClr val="BCCBD0"/>
-                </a:solidFill>
-                <a:latin typeface="Meiryo"/>
-                <a:ea typeface="Meiryo"/>
-                <a:cs typeface="Meiryo"/>
-              </a:defRPr>
-            </a:lvl1pPr>
-            <a:lvl2pPr>
-              <a:defRPr sz="1200" b="0">
-                <a:solidFill>
-                  <a:srgbClr val="BCCBD0"/>
-                </a:solidFill>
-                <a:latin typeface="Meiryo"/>
-                <a:ea typeface="Meiryo"/>
-                <a:cs typeface="Meiryo"/>
-              </a:defRPr>
-            </a:lvl2pPr>
-            <a:lvl3pPr>
-              <a:defRPr sz="1200" b="0">
-                <a:solidFill>
-                  <a:srgbClr val="BCCBD0"/>
-                </a:solidFill>
-                <a:latin typeface="Meiryo"/>
-                <a:ea typeface="Meiryo"/>
-                <a:cs typeface="Meiryo"/>
-              </a:defRPr>
-            </a:lvl3pPr>
-            <a:lvl4pPr>
-              <a:defRPr sz="1200" b="0">
-                <a:solidFill>
-                  <a:srgbClr val="BCCBD0"/>
-                </a:solidFill>
-                <a:latin typeface="Meiryo"/>
-                <a:ea typeface="Meiryo"/>
-                <a:cs typeface="Meiryo"/>
-              </a:defRPr>
-            </a:lvl4pPr>
-            <a:lvl5pPr>
-              <a:defRPr sz="1200" b="0">
-                <a:solidFill>
-                  <a:srgbClr val="BCCBD0"/>
-                </a:solidFill>
-                <a:latin typeface="Meiryo"/>
-                <a:ea typeface="Meiryo"/>
-                <a:cs typeface="Meiryo"/>
-              </a:defRPr>
-            </a:lvl5pPr>
-            <a:lvl6pPr>
-              <a:defRPr sz="1200" b="0">
-                <a:solidFill>
-                  <a:srgbClr val="BCCBD0"/>
-                </a:solidFill>
-                <a:latin typeface="Meiryo"/>
-                <a:ea typeface="Meiryo"/>
-                <a:cs typeface="Meiryo"/>
-              </a:defRPr>
-            </a:lvl6pPr>
-            <a:lvl7pPr>
-              <a:defRPr sz="1200" b="0">
-                <a:solidFill>
-                  <a:srgbClr val="BCCBD0"/>
-                </a:solidFill>
-                <a:latin typeface="Meiryo"/>
-                <a:ea typeface="Meiryo"/>
-                <a:cs typeface="Meiryo"/>
-              </a:defRPr>
-            </a:lvl7pPr>
-            <a:lvl8pPr>
-              <a:defRPr sz="1200" b="0">
-                <a:solidFill>
-                  <a:srgbClr val="BCCBD0"/>
-                </a:solidFill>
-                <a:latin typeface="Meiryo"/>
-                <a:ea typeface="Meiryo"/>
-                <a:cs typeface="Meiryo"/>
-              </a:defRPr>
-            </a:lvl8pPr>
-            <a:lvl9pPr>
-              <a:defRPr sz="1200" b="0">
-                <a:solidFill>
-                  <a:srgbClr val="BCCBD0"/>
-                </a:solidFill>
-                <a:latin typeface="Meiryo"/>
-                <a:ea typeface="Meiryo"/>
-                <a:cs typeface="Meiryo"/>
-              </a:defRPr>
-            </a:lvl9pPr>
-          </a:lstStyle>
-          <a:p xmlns:a="http://schemas.openxmlformats.org/drawingml/2006/main">
-            <a:pPr>
-              <a:lnSpc>
-                <a:spcPct val="118000"/>
-              </a:lnSpc>
-              <a:buNone/>
-              <a:defRPr sz="1200" b="0">
-                <a:solidFill>
-                  <a:srgbClr val="BCCBD0"/>
-                </a:solidFill>
-                <a:latin typeface="Meiryo"/>
-                <a:ea typeface="Meiryo"/>
-                <a:cs typeface="Meiryo"/>
-              </a:defRPr>
-            </a:pPr>
-            <a:r>
-              <a:rPr sz="1200" b="0">
-                <a:solidFill>
-                  <a:srgbClr val="BCCBD0"/>
-                </a:solidFill>
-                <a:latin typeface="Meiryo"/>
-                <a:ea typeface="Meiryo"/>
-                <a:cs typeface="Meiryo"/>
-              </a:rPr>
-              <a:t>すべる宇宙駐車場 / 企画書</a:t>
-            </a:r>
-          </a:p>
-        </p:txBody>
-      </p:sp>
-      <p:sp>
-        <p:nvSpPr>
-          <p:cNvPr id="4" name="05 / 06">
-            <a:extLst xmlns:a="http://schemas.openxmlformats.org/drawingml/2006/main">
-              <a:ext uri="{FF2B5EF4-FFF2-40B4-BE49-F238E27FC236}">
-                <a16:creationId xmlns:a16="http://schemas.microsoft.com/office/drawing/2014/main" id="{2BB79AD0-CBC7-4E12-9190-3F187E42EC83}"/>
-              </a:ext>
-            </a:extLst>
-          </p:cNvPr>
-          <p:cNvSpPr>
-            <a:spLocks xmlns:a="http://schemas.openxmlformats.org/drawingml/2006/main" noGrp="1"/>
-          </p:cNvSpPr>
-          <p:nvPr/>
-        </p:nvSpPr>
-        <p:spPr>
-          <a:xfrm xmlns:a="http://schemas.openxmlformats.org/drawingml/2006/main">
-            <a:off x="10668000" y="6448425"/>
-            <a:ext cx="952500" cy="247650"/>
-          </a:xfrm>
-          <a:prstGeom xmlns:a="http://schemas.openxmlformats.org/drawingml/2006/main" prst="rect">
-            <a:avLst/>
-          </a:prstGeom>
-          <a:noFill xmlns:a="http://schemas.openxmlformats.org/drawingml/2006/main"/>
-          <a:ln xmlns:a="http://schemas.openxmlformats.org/drawingml/2006/main" w="0">
-            <a:noFill/>
-          </a:ln>
-        </p:spPr>
-        <p:txBody>
-          <a:bodyPr xmlns:a="http://schemas.openxmlformats.org/drawingml/2006/main" wrap="square" lIns="0" tIns="0" rIns="0" bIns="0" anchor="t">
-            <a:noAutofit/>
-          </a:bodyPr>
-          <a:lstStyle xmlns:a="http://schemas.openxmlformats.org/drawingml/2006/main">
-            <a:defPPr>
-              <a:defRPr sz="1200" b="0">
-                <a:solidFill>
-                  <a:srgbClr val="BCCBD0"/>
-                </a:solidFill>
-                <a:latin typeface="Meiryo"/>
-                <a:ea typeface="Meiryo"/>
-                <a:cs typeface="Meiryo"/>
-              </a:defRPr>
-            </a:defPPr>
-            <a:lvl1pPr>
-              <a:defRPr sz="1200" b="0">
-                <a:solidFill>
-                  <a:srgbClr val="BCCBD0"/>
-                </a:solidFill>
-                <a:latin typeface="Meiryo"/>
-                <a:ea typeface="Meiryo"/>
-                <a:cs typeface="Meiryo"/>
-              </a:defRPr>
-            </a:lvl1pPr>
-            <a:lvl2pPr>
-              <a:defRPr sz="1200" b="0">
-                <a:solidFill>
-                  <a:srgbClr val="BCCBD0"/>
-                </a:solidFill>
-                <a:latin typeface="Meiryo"/>
-                <a:ea typeface="Meiryo"/>
-                <a:cs typeface="Meiryo"/>
-              </a:defRPr>
-            </a:lvl2pPr>
-            <a:lvl3pPr>
-              <a:defRPr sz="1200" b="0">
-                <a:solidFill>
-                  <a:srgbClr val="BCCBD0"/>
-                </a:solidFill>
-                <a:latin typeface="Meiryo"/>
-                <a:ea typeface="Meiryo"/>
-                <a:cs typeface="Meiryo"/>
-              </a:defRPr>
-            </a:lvl3pPr>
-            <a:lvl4pPr>
-              <a:defRPr sz="1200" b="0">
-                <a:solidFill>
-                  <a:srgbClr val="BCCBD0"/>
-                </a:solidFill>
-                <a:latin typeface="Meiryo"/>
-                <a:ea typeface="Meiryo"/>
-                <a:cs typeface="Meiryo"/>
-              </a:defRPr>
-            </a:lvl4pPr>
-            <a:lvl5pPr>
-              <a:defRPr sz="1200" b="0">
-                <a:solidFill>
-                  <a:srgbClr val="BCCBD0"/>
-                </a:solidFill>
-                <a:latin typeface="Meiryo"/>
-                <a:ea typeface="Meiryo"/>
-                <a:cs typeface="Meiryo"/>
-              </a:defRPr>
-            </a:lvl5pPr>
-            <a:lvl6pPr>
-              <a:defRPr sz="1200" b="0">
-                <a:solidFill>
-                  <a:srgbClr val="BCCBD0"/>
-                </a:solidFill>
-                <a:latin typeface="Meiryo"/>
-                <a:ea typeface="Meiryo"/>
-                <a:cs typeface="Meiryo"/>
-              </a:defRPr>
-            </a:lvl6pPr>
-            <a:lvl7pPr>
-              <a:defRPr sz="1200" b="0">
-                <a:solidFill>
-                  <a:srgbClr val="BCCBD0"/>
-                </a:solidFill>
-                <a:latin typeface="Meiryo"/>
-                <a:ea typeface="Meiryo"/>
-                <a:cs typeface="Meiryo"/>
-              </a:defRPr>
-            </a:lvl7pPr>
-            <a:lvl8pPr>
-              <a:defRPr sz="1200" b="0">
-                <a:solidFill>
-                  <a:srgbClr val="BCCBD0"/>
-                </a:solidFill>
-                <a:latin typeface="Meiryo"/>
-                <a:ea typeface="Meiryo"/>
-                <a:cs typeface="Meiryo"/>
-              </a:defRPr>
-            </a:lvl8pPr>
-            <a:lvl9pPr>
-              <a:defRPr sz="1200" b="0">
-                <a:solidFill>
-                  <a:srgbClr val="BCCBD0"/>
-                </a:solidFill>
-                <a:latin typeface="Meiryo"/>
-                <a:ea typeface="Meiryo"/>
-                <a:cs typeface="Meiryo"/>
-              </a:defRPr>
-            </a:lvl9pPr>
-          </a:lstStyle>
-          <a:p xmlns:a="http://schemas.openxmlformats.org/drawingml/2006/main">
-            <a:pPr>
-              <a:lnSpc>
-                <a:spcPct val="118000"/>
-              </a:lnSpc>
-              <a:buNone/>
-              <a:defRPr sz="1200" b="0">
-                <a:solidFill>
-                  <a:srgbClr val="BCCBD0"/>
-                </a:solidFill>
-                <a:latin typeface="Meiryo"/>
-                <a:ea typeface="Meiryo"/>
-                <a:cs typeface="Meiryo"/>
-              </a:defRPr>
-            </a:pPr>
-            <a:r>
-              <a:rPr sz="1200" b="0">
-                <a:solidFill>
-                  <a:srgbClr val="BCCBD0"/>
-                </a:solidFill>
-                <a:latin typeface="Meiryo"/>
-                <a:ea typeface="Meiryo"/>
-                <a:cs typeface="Meiryo"/>
-              </a:rPr>
-              <a:t>05 / 06</a:t>
-            </a:r>
-          </a:p>
-        </p:txBody>
-      </p:sp>
-      <p:pic>
-        <p:nvPicPr>
-          <p:cNvPr id="5" name="">
-            <a:extLst xmlns:a="http://schemas.openxmlformats.org/drawingml/2006/main">
-              <a:ext uri="{FF2B5EF4-FFF2-40B4-BE49-F238E27FC236}">
-                <a16:creationId xmlns:a16="http://schemas.microsoft.com/office/drawing/2014/main" id="{93BB606C-4151-4D20-81CB-53F6ED369924}"/>
+                <a16:creationId xmlns:a16="http://schemas.microsoft.com/office/drawing/2014/main" id="{71604EAA-3A3F-4461-B373-CAD760CF467B}"/>
               </a:ext>
             </a:extLst>
           </p:cNvPr>
@@ -9881,7 +8261,7 @@
           <p:nvPr/>
         </p:nvPicPr>
         <p:blipFill>
-          <a:blip xmlns:r="http://schemas.openxmlformats.org/officeDocument/2006/relationships" xmlns:a="http://schemas.openxmlformats.org/drawingml/2006/main" r:embed="R8d638adf9b3f4c62"/>
+          <a:blip xmlns:r="http://schemas.openxmlformats.org/officeDocument/2006/relationships" xmlns:a="http://schemas.openxmlformats.org/drawingml/2006/main" r:embed="R7403c783d2944d17"/>
           <a:stretch xmlns:a="http://schemas.openxmlformats.org/drawingml/2006/main"/>
         </p:blipFill>
         <p:spPr>
@@ -9896,10 +8276,10 @@
       </p:pic>
       <p:sp>
         <p:nvSpPr>
-          <p:cNvPr id="6" name="やり直す目標が見える">
+          <p:cNvPr id="4" name="やり直す目標が見える">
             <a:extLst xmlns:a="http://schemas.openxmlformats.org/drawingml/2006/main">
               <a:ext uri="{FF2B5EF4-FFF2-40B4-BE49-F238E27FC236}">
-                <a16:creationId xmlns:a16="http://schemas.microsoft.com/office/drawing/2014/main" id="{6AC11580-55AF-4363-A19D-789B417F1F2E}"/>
+                <a16:creationId xmlns:a16="http://schemas.microsoft.com/office/drawing/2014/main" id="{83E72158-4020-4F7C-99A2-257869CB6FFB}"/>
               </a:ext>
             </a:extLst>
           </p:cNvPr>
@@ -10058,10 +8438,10 @@
       </p:sp>
       <p:sp>
         <p:nvSpPr>
-          <p:cNvPr id="7" name="走行時間・操作回数・&#10;衝突回数で振り返る。&#10;次に減らしたいミスを&#10;決めて">
+          <p:cNvPr id="5" name="走行時間・操作回数・&#10;衝突回数で振り返る。&#10;次に減らしたいミスを&#10;決めて">
             <a:extLst xmlns:a="http://schemas.openxmlformats.org/drawingml/2006/main">
               <a:ext uri="{FF2B5EF4-FFF2-40B4-BE49-F238E27FC236}">
-                <a16:creationId xmlns:a16="http://schemas.microsoft.com/office/drawing/2014/main" id="{A2343021-BB61-4967-8DF1-957D791B839F}"/>
+                <a16:creationId xmlns:a16="http://schemas.microsoft.com/office/drawing/2014/main" id="{D0A07F3B-8128-4FB2-BC71-0781B23CE861}"/>
               </a:ext>
             </a:extLst>
           </p:cNvPr>
@@ -10301,10 +8681,10 @@
       </p:sp>
       <p:sp>
         <p:nvSpPr>
-          <p:cNvPr id="8" name="iOS公開版">
+          <p:cNvPr id="6" name="iOS公開版">
             <a:extLst xmlns:a="http://schemas.openxmlformats.org/drawingml/2006/main">
               <a:ext uri="{FF2B5EF4-FFF2-40B4-BE49-F238E27FC236}">
-                <a16:creationId xmlns:a16="http://schemas.microsoft.com/office/drawing/2014/main" id="{42191936-B117-4ADF-BB92-0298C5D9C3CF}"/>
+                <a16:creationId xmlns:a16="http://schemas.microsoft.com/office/drawing/2014/main" id="{1E64885E-850C-4E95-85FD-20DB3450827D}"/>
               </a:ext>
             </a:extLst>
           </p:cNvPr>
@@ -10463,10 +8843,10 @@
       </p:sp>
       <p:sp>
         <p:nvSpPr>
-          <p:cNvPr id="9" name="全6コース、S〜C評価。&#10;Game Centerの&#10;ランキングにも対応。">
+          <p:cNvPr id="7" name="全6コース、S〜C評価。&#10;Game Centerの&#10;ランキングにも対応。">
             <a:extLst xmlns:a="http://schemas.openxmlformats.org/drawingml/2006/main">
               <a:ext uri="{FF2B5EF4-FFF2-40B4-BE49-F238E27FC236}">
-                <a16:creationId xmlns:a16="http://schemas.microsoft.com/office/drawing/2014/main" id="{0EB426D0-DFFC-4B31-BADC-2807B4FBF9A1}"/>
+                <a16:creationId xmlns:a16="http://schemas.microsoft.com/office/drawing/2014/main" id="{762B16AA-8F90-48D6-AFFD-074879505B0F}"/>
               </a:ext>
             </a:extLst>
           </p:cNvPr>
@@ -10679,10 +9059,10 @@
       </p:sp>
       <p:sp>
         <p:nvSpPr>
-          <p:cNvPr id="10" name="初回は駐車成功を、慣れてきたら自分の記録更新を目指す構成。">
+          <p:cNvPr id="8" name="初回は駐車成功を、慣れてきたら自分の記録更新を目指す構成。">
             <a:extLst xmlns:a="http://schemas.openxmlformats.org/drawingml/2006/main">
               <a:ext uri="{FF2B5EF4-FFF2-40B4-BE49-F238E27FC236}">
-                <a16:creationId xmlns:a16="http://schemas.microsoft.com/office/drawing/2014/main" id="{43384907-82C7-473B-9B48-36FE7E8C92F8}"/>
+                <a16:creationId xmlns:a16="http://schemas.microsoft.com/office/drawing/2014/main" id="{29ACF9C7-2E8F-48E2-A3EF-A7D783EE8B3D}"/>
               </a:ext>
             </a:extLst>
           </p:cNvPr>
@@ -10842,7 +9222,7 @@
     </p:spTree>
     <p:extLst>
       <p:ext uri="{BB962C8B-B14F-4D97-AF65-F5344CB8AC3E}">
-        <p14:creationId xmlns:p14="http://schemas.microsoft.com/office/powerpoint/2010/main" val="1452108337"/>
+        <p14:creationId xmlns:p14="http://schemas.microsoft.com/office/powerpoint/2010/main" val="759082153"/>
       </p:ext>
     </p:extLst>
   </p:cSld>
@@ -10870,10 +9250,10 @@
       </p:grpSpPr>
       <p:sp>
         <p:nvSpPr>
-          <p:cNvPr id="12" name="制作体制と公開先">
+          <p:cNvPr id="10" name="制作体制と公開先">
             <a:extLst xmlns:a="http://schemas.openxmlformats.org/drawingml/2006/main">
               <a:ext uri="{FF2B5EF4-FFF2-40B4-BE49-F238E27FC236}">
-                <a16:creationId xmlns:a16="http://schemas.microsoft.com/office/drawing/2014/main" id="{4E04CD9D-36A5-42A2-9553-3996F00A08D9}"/>
+                <a16:creationId xmlns:a16="http://schemas.microsoft.com/office/drawing/2014/main" id="{1D94A3FB-9C74-49DE-9CC0-CED34A9B1853}"/>
               </a:ext>
             </a:extLst>
           </p:cNvPr>
@@ -11035,7 +9415,7 @@
           <p:cNvPr id="2" name="制作人数：4人 / 開発環境：Unity 6">
             <a:extLst xmlns:a="http://schemas.openxmlformats.org/drawingml/2006/main">
               <a:ext uri="{FF2B5EF4-FFF2-40B4-BE49-F238E27FC236}">
-                <a16:creationId xmlns:a16="http://schemas.microsoft.com/office/drawing/2014/main" id="{7A8F0108-CDFD-4B63-BA21-4B33404A500E}"/>
+                <a16:creationId xmlns:a16="http://schemas.microsoft.com/office/drawing/2014/main" id="{FA5DE6FC-D3C5-4578-AD43-7E7B84C82969}"/>
               </a:ext>
             </a:extLst>
           </p:cNvPr>
@@ -11192,336 +9572,12 @@
           </a:p>
         </p:txBody>
       </p:sp>
-      <p:sp>
-        <p:nvSpPr>
-          <p:cNvPr id="3" name="すべる宇宙駐車場 / 企画書">
+      <p:pic>
+        <p:nvPicPr>
+          <p:cNvPr id="3" name="">
             <a:extLst xmlns:a="http://schemas.openxmlformats.org/drawingml/2006/main">
               <a:ext uri="{FF2B5EF4-FFF2-40B4-BE49-F238E27FC236}">
-                <a16:creationId xmlns:a16="http://schemas.microsoft.com/office/drawing/2014/main" id="{79093C67-019A-4E5B-A2BD-FE349E859CBF}"/>
-              </a:ext>
-            </a:extLst>
-          </p:cNvPr>
-          <p:cNvSpPr>
-            <a:spLocks xmlns:a="http://schemas.openxmlformats.org/drawingml/2006/main" noGrp="1"/>
-          </p:cNvSpPr>
-          <p:nvPr/>
-        </p:nvSpPr>
-        <p:spPr>
-          <a:xfrm xmlns:a="http://schemas.openxmlformats.org/drawingml/2006/main">
-            <a:off x="609600" y="6448425"/>
-            <a:ext cx="9525000" cy="247650"/>
-          </a:xfrm>
-          <a:prstGeom xmlns:a="http://schemas.openxmlformats.org/drawingml/2006/main" prst="rect">
-            <a:avLst/>
-          </a:prstGeom>
-          <a:noFill xmlns:a="http://schemas.openxmlformats.org/drawingml/2006/main"/>
-          <a:ln xmlns:a="http://schemas.openxmlformats.org/drawingml/2006/main" w="0">
-            <a:noFill/>
-          </a:ln>
-        </p:spPr>
-        <p:txBody>
-          <a:bodyPr xmlns:a="http://schemas.openxmlformats.org/drawingml/2006/main" wrap="square" lIns="0" tIns="0" rIns="0" bIns="0" anchor="t">
-            <a:noAutofit/>
-          </a:bodyPr>
-          <a:lstStyle xmlns:a="http://schemas.openxmlformats.org/drawingml/2006/main">
-            <a:defPPr>
-              <a:defRPr sz="1200" b="0">
-                <a:solidFill>
-                  <a:srgbClr val="BCCBD0"/>
-                </a:solidFill>
-                <a:latin typeface="Meiryo"/>
-                <a:ea typeface="Meiryo"/>
-                <a:cs typeface="Meiryo"/>
-              </a:defRPr>
-            </a:defPPr>
-            <a:lvl1pPr>
-              <a:defRPr sz="1200" b="0">
-                <a:solidFill>
-                  <a:srgbClr val="BCCBD0"/>
-                </a:solidFill>
-                <a:latin typeface="Meiryo"/>
-                <a:ea typeface="Meiryo"/>
-                <a:cs typeface="Meiryo"/>
-              </a:defRPr>
-            </a:lvl1pPr>
-            <a:lvl2pPr>
-              <a:defRPr sz="1200" b="0">
-                <a:solidFill>
-                  <a:srgbClr val="BCCBD0"/>
-                </a:solidFill>
-                <a:latin typeface="Meiryo"/>
-                <a:ea typeface="Meiryo"/>
-                <a:cs typeface="Meiryo"/>
-              </a:defRPr>
-            </a:lvl2pPr>
-            <a:lvl3pPr>
-              <a:defRPr sz="1200" b="0">
-                <a:solidFill>
-                  <a:srgbClr val="BCCBD0"/>
-                </a:solidFill>
-                <a:latin typeface="Meiryo"/>
-                <a:ea typeface="Meiryo"/>
-                <a:cs typeface="Meiryo"/>
-              </a:defRPr>
-            </a:lvl3pPr>
-            <a:lvl4pPr>
-              <a:defRPr sz="1200" b="0">
-                <a:solidFill>
-                  <a:srgbClr val="BCCBD0"/>
-                </a:solidFill>
-                <a:latin typeface="Meiryo"/>
-                <a:ea typeface="Meiryo"/>
-                <a:cs typeface="Meiryo"/>
-              </a:defRPr>
-            </a:lvl4pPr>
-            <a:lvl5pPr>
-              <a:defRPr sz="1200" b="0">
-                <a:solidFill>
-                  <a:srgbClr val="BCCBD0"/>
-                </a:solidFill>
-                <a:latin typeface="Meiryo"/>
-                <a:ea typeface="Meiryo"/>
-                <a:cs typeface="Meiryo"/>
-              </a:defRPr>
-            </a:lvl5pPr>
-            <a:lvl6pPr>
-              <a:defRPr sz="1200" b="0">
-                <a:solidFill>
-                  <a:srgbClr val="BCCBD0"/>
-                </a:solidFill>
-                <a:latin typeface="Meiryo"/>
-                <a:ea typeface="Meiryo"/>
-                <a:cs typeface="Meiryo"/>
-              </a:defRPr>
-            </a:lvl6pPr>
-            <a:lvl7pPr>
-              <a:defRPr sz="1200" b="0">
-                <a:solidFill>
-                  <a:srgbClr val="BCCBD0"/>
-                </a:solidFill>
-                <a:latin typeface="Meiryo"/>
-                <a:ea typeface="Meiryo"/>
-                <a:cs typeface="Meiryo"/>
-              </a:defRPr>
-            </a:lvl7pPr>
-            <a:lvl8pPr>
-              <a:defRPr sz="1200" b="0">
-                <a:solidFill>
-                  <a:srgbClr val="BCCBD0"/>
-                </a:solidFill>
-                <a:latin typeface="Meiryo"/>
-                <a:ea typeface="Meiryo"/>
-                <a:cs typeface="Meiryo"/>
-              </a:defRPr>
-            </a:lvl8pPr>
-            <a:lvl9pPr>
-              <a:defRPr sz="1200" b="0">
-                <a:solidFill>
-                  <a:srgbClr val="BCCBD0"/>
-                </a:solidFill>
-                <a:latin typeface="Meiryo"/>
-                <a:ea typeface="Meiryo"/>
-                <a:cs typeface="Meiryo"/>
-              </a:defRPr>
-            </a:lvl9pPr>
-          </a:lstStyle>
-          <a:p xmlns:a="http://schemas.openxmlformats.org/drawingml/2006/main">
-            <a:pPr>
-              <a:lnSpc>
-                <a:spcPct val="118000"/>
-              </a:lnSpc>
-              <a:buNone/>
-              <a:defRPr sz="1200" b="0">
-                <a:solidFill>
-                  <a:srgbClr val="BCCBD0"/>
-                </a:solidFill>
-                <a:latin typeface="Meiryo"/>
-                <a:ea typeface="Meiryo"/>
-                <a:cs typeface="Meiryo"/>
-              </a:defRPr>
-            </a:pPr>
-            <a:r>
-              <a:rPr sz="1200" b="0">
-                <a:solidFill>
-                  <a:srgbClr val="BCCBD0"/>
-                </a:solidFill>
-                <a:latin typeface="Meiryo"/>
-                <a:ea typeface="Meiryo"/>
-                <a:cs typeface="Meiryo"/>
-              </a:rPr>
-              <a:t>すべる宇宙駐車場 / 企画書</a:t>
-            </a:r>
-          </a:p>
-        </p:txBody>
-      </p:sp>
-      <p:sp>
-        <p:nvSpPr>
-          <p:cNvPr id="4" name="06 / 06">
-            <a:extLst xmlns:a="http://schemas.openxmlformats.org/drawingml/2006/main">
-              <a:ext uri="{FF2B5EF4-FFF2-40B4-BE49-F238E27FC236}">
-                <a16:creationId xmlns:a16="http://schemas.microsoft.com/office/drawing/2014/main" id="{D15CBB3C-3E28-4687-84C4-EB2519EC5D7F}"/>
-              </a:ext>
-            </a:extLst>
-          </p:cNvPr>
-          <p:cNvSpPr>
-            <a:spLocks xmlns:a="http://schemas.openxmlformats.org/drawingml/2006/main" noGrp="1"/>
-          </p:cNvSpPr>
-          <p:nvPr/>
-        </p:nvSpPr>
-        <p:spPr>
-          <a:xfrm xmlns:a="http://schemas.openxmlformats.org/drawingml/2006/main">
-            <a:off x="10668000" y="6448425"/>
-            <a:ext cx="952500" cy="247650"/>
-          </a:xfrm>
-          <a:prstGeom xmlns:a="http://schemas.openxmlformats.org/drawingml/2006/main" prst="rect">
-            <a:avLst/>
-          </a:prstGeom>
-          <a:noFill xmlns:a="http://schemas.openxmlformats.org/drawingml/2006/main"/>
-          <a:ln xmlns:a="http://schemas.openxmlformats.org/drawingml/2006/main" w="0">
-            <a:noFill/>
-          </a:ln>
-        </p:spPr>
-        <p:txBody>
-          <a:bodyPr xmlns:a="http://schemas.openxmlformats.org/drawingml/2006/main" wrap="square" lIns="0" tIns="0" rIns="0" bIns="0" anchor="t">
-            <a:noAutofit/>
-          </a:bodyPr>
-          <a:lstStyle xmlns:a="http://schemas.openxmlformats.org/drawingml/2006/main">
-            <a:defPPr>
-              <a:defRPr sz="1200" b="0">
-                <a:solidFill>
-                  <a:srgbClr val="BCCBD0"/>
-                </a:solidFill>
-                <a:latin typeface="Meiryo"/>
-                <a:ea typeface="Meiryo"/>
-                <a:cs typeface="Meiryo"/>
-              </a:defRPr>
-            </a:defPPr>
-            <a:lvl1pPr>
-              <a:defRPr sz="1200" b="0">
-                <a:solidFill>
-                  <a:srgbClr val="BCCBD0"/>
-                </a:solidFill>
-                <a:latin typeface="Meiryo"/>
-                <a:ea typeface="Meiryo"/>
-                <a:cs typeface="Meiryo"/>
-              </a:defRPr>
-            </a:lvl1pPr>
-            <a:lvl2pPr>
-              <a:defRPr sz="1200" b="0">
-                <a:solidFill>
-                  <a:srgbClr val="BCCBD0"/>
-                </a:solidFill>
-                <a:latin typeface="Meiryo"/>
-                <a:ea typeface="Meiryo"/>
-                <a:cs typeface="Meiryo"/>
-              </a:defRPr>
-            </a:lvl2pPr>
-            <a:lvl3pPr>
-              <a:defRPr sz="1200" b="0">
-                <a:solidFill>
-                  <a:srgbClr val="BCCBD0"/>
-                </a:solidFill>
-                <a:latin typeface="Meiryo"/>
-                <a:ea typeface="Meiryo"/>
-                <a:cs typeface="Meiryo"/>
-              </a:defRPr>
-            </a:lvl3pPr>
-            <a:lvl4pPr>
-              <a:defRPr sz="1200" b="0">
-                <a:solidFill>
-                  <a:srgbClr val="BCCBD0"/>
-                </a:solidFill>
-                <a:latin typeface="Meiryo"/>
-                <a:ea typeface="Meiryo"/>
-                <a:cs typeface="Meiryo"/>
-              </a:defRPr>
-            </a:lvl4pPr>
-            <a:lvl5pPr>
-              <a:defRPr sz="1200" b="0">
-                <a:solidFill>
-                  <a:srgbClr val="BCCBD0"/>
-                </a:solidFill>
-                <a:latin typeface="Meiryo"/>
-                <a:ea typeface="Meiryo"/>
-                <a:cs typeface="Meiryo"/>
-              </a:defRPr>
-            </a:lvl5pPr>
-            <a:lvl6pPr>
-              <a:defRPr sz="1200" b="0">
-                <a:solidFill>
-                  <a:srgbClr val="BCCBD0"/>
-                </a:solidFill>
-                <a:latin typeface="Meiryo"/>
-                <a:ea typeface="Meiryo"/>
-                <a:cs typeface="Meiryo"/>
-              </a:defRPr>
-            </a:lvl6pPr>
-            <a:lvl7pPr>
-              <a:defRPr sz="1200" b="0">
-                <a:solidFill>
-                  <a:srgbClr val="BCCBD0"/>
-                </a:solidFill>
-                <a:latin typeface="Meiryo"/>
-                <a:ea typeface="Meiryo"/>
-                <a:cs typeface="Meiryo"/>
-              </a:defRPr>
-            </a:lvl7pPr>
-            <a:lvl8pPr>
-              <a:defRPr sz="1200" b="0">
-                <a:solidFill>
-                  <a:srgbClr val="BCCBD0"/>
-                </a:solidFill>
-                <a:latin typeface="Meiryo"/>
-                <a:ea typeface="Meiryo"/>
-                <a:cs typeface="Meiryo"/>
-              </a:defRPr>
-            </a:lvl8pPr>
-            <a:lvl9pPr>
-              <a:defRPr sz="1200" b="0">
-                <a:solidFill>
-                  <a:srgbClr val="BCCBD0"/>
-                </a:solidFill>
-                <a:latin typeface="Meiryo"/>
-                <a:ea typeface="Meiryo"/>
-                <a:cs typeface="Meiryo"/>
-              </a:defRPr>
-            </a:lvl9pPr>
-          </a:lstStyle>
-          <a:p xmlns:a="http://schemas.openxmlformats.org/drawingml/2006/main">
-            <a:pPr>
-              <a:lnSpc>
-                <a:spcPct val="118000"/>
-              </a:lnSpc>
-              <a:buNone/>
-              <a:defRPr sz="1200" b="0">
-                <a:solidFill>
-                  <a:srgbClr val="BCCBD0"/>
-                </a:solidFill>
-                <a:latin typeface="Meiryo"/>
-                <a:ea typeface="Meiryo"/>
-                <a:cs typeface="Meiryo"/>
-              </a:defRPr>
-            </a:pPr>
-            <a:r>
-              <a:rPr sz="1200" b="0">
-                <a:solidFill>
-                  <a:srgbClr val="BCCBD0"/>
-                </a:solidFill>
-                <a:latin typeface="Meiryo"/>
-                <a:ea typeface="Meiryo"/>
-                <a:cs typeface="Meiryo"/>
-              </a:rPr>
-              <a:t>06 / 06</a:t>
-            </a:r>
-          </a:p>
-        </p:txBody>
-      </p:sp>
-      <p:pic>
-        <p:nvPicPr>
-          <p:cNvPr id="5" name="">
-            <a:extLst xmlns:a="http://schemas.openxmlformats.org/drawingml/2006/main">
-              <a:ext uri="{FF2B5EF4-FFF2-40B4-BE49-F238E27FC236}">
-                <a16:creationId xmlns:a16="http://schemas.microsoft.com/office/drawing/2014/main" id="{900C9C28-BB6F-46D6-9FD2-3D624540CEFA}"/>
+                <a16:creationId xmlns:a16="http://schemas.microsoft.com/office/drawing/2014/main" id="{508CA993-E4BE-4C52-8722-3FB4BCE9FFE8}"/>
               </a:ext>
             </a:extLst>
           </p:cNvPr>
@@ -11531,7 +9587,7 @@
           <p:nvPr/>
         </p:nvPicPr>
         <p:blipFill>
-          <a:blip xmlns:r="http://schemas.openxmlformats.org/officeDocument/2006/relationships" xmlns:a="http://schemas.openxmlformats.org/drawingml/2006/main" r:embed="R9bed17aa0a4347ba"/>
+          <a:blip xmlns:r="http://schemas.openxmlformats.org/officeDocument/2006/relationships" xmlns:a="http://schemas.openxmlformats.org/drawingml/2006/main" r:embed="R7a01a4380bbf444b"/>
           <a:stretch xmlns:a="http://schemas.openxmlformats.org/drawingml/2006/main"/>
         </p:blipFill>
         <p:spPr>
@@ -11546,10 +9602,10 @@
       </p:pic>
       <p:sp>
         <p:nvSpPr>
-          <p:cNvPr id="6" name="私の担当">
+          <p:cNvPr id="4" name="私の担当">
             <a:extLst xmlns:a="http://schemas.openxmlformats.org/drawingml/2006/main">
               <a:ext uri="{FF2B5EF4-FFF2-40B4-BE49-F238E27FC236}">
-                <a16:creationId xmlns:a16="http://schemas.microsoft.com/office/drawing/2014/main" id="{711E3DF6-D9A3-4ECE-A42D-DD6D7A4425F7}"/>
+                <a16:creationId xmlns:a16="http://schemas.microsoft.com/office/drawing/2014/main" id="{CACD69DC-80EC-4EDF-A3B9-B749CA9A91AD}"/>
               </a:ext>
             </a:extLst>
           </p:cNvPr>
@@ -11708,10 +9764,10 @@
       </p:sp>
       <p:sp>
         <p:nvSpPr>
-          <p:cNvPr id="7" name="企画立案・整理・画像作成・SE。&#10;慣性と駐車を組み合わせた遊びをまとめ、">
+          <p:cNvPr id="5" name="企画立案・整理・画像作成・SE。&#10;慣性と駐車を組み合わせた遊びをまとめ、">
             <a:extLst xmlns:a="http://schemas.openxmlformats.org/drawingml/2006/main">
               <a:ext uri="{FF2B5EF4-FFF2-40B4-BE49-F238E27FC236}">
-                <a16:creationId xmlns:a16="http://schemas.microsoft.com/office/drawing/2014/main" id="{B97A7DE9-D808-47AB-BA47-AD2557E3A31C}"/>
+                <a16:creationId xmlns:a16="http://schemas.microsoft.com/office/drawing/2014/main" id="{527CD58C-E510-49C0-8D4C-33AD48257C85}"/>
               </a:ext>
             </a:extLst>
           </p:cNvPr>
@@ -11924,10 +9980,10 @@
       </p:sp>
       <p:sp>
         <p:nvSpPr>
-          <p:cNvPr id="8" name="公開形態">
+          <p:cNvPr id="6" name="公開形態">
             <a:extLst xmlns:a="http://schemas.openxmlformats.org/drawingml/2006/main">
               <a:ext uri="{FF2B5EF4-FFF2-40B4-BE49-F238E27FC236}">
-                <a16:creationId xmlns:a16="http://schemas.microsoft.com/office/drawing/2014/main" id="{DD25F7C5-7F97-4BD0-BE94-334C096D8BDB}"/>
+                <a16:creationId xmlns:a16="http://schemas.microsoft.com/office/drawing/2014/main" id="{52D6FAB0-81E7-480A-972B-F1ED9C864D64}"/>
               </a:ext>
             </a:extLst>
           </p:cNvPr>
@@ -12086,10 +10142,10 @@
       </p:sp>
       <p:sp>
         <p:nvSpPr>
-          <p:cNvPr id="9" name="iPhone・iPad向けにApp Storeで公開。&#10;PCではunit">
+          <p:cNvPr id="7" name="iPhone・iPad向けにApp Storeで公開。&#10;PCではunit">
             <a:extLst xmlns:a="http://schemas.openxmlformats.org/drawingml/2006/main">
               <a:ext uri="{FF2B5EF4-FFF2-40B4-BE49-F238E27FC236}">
-                <a16:creationId xmlns:a16="http://schemas.microsoft.com/office/drawing/2014/main" id="{D5FD6144-CFB8-4037-BE51-1029D189F8E2}"/>
+                <a16:creationId xmlns:a16="http://schemas.microsoft.com/office/drawing/2014/main" id="{FD0410C9-6519-449E-9AFC-755752A22676}"/>
               </a:ext>
             </a:extLst>
           </p:cNvPr>
@@ -12275,10 +10331,10 @@
       </p:sp>
       <p:sp>
         <p:nvSpPr>
-          <p:cNvPr id="10" name="App Storeで見る">
+          <p:cNvPr id="8" name="App Storeで見る">
             <a:extLst xmlns:a="http://schemas.openxmlformats.org/drawingml/2006/main">
               <a:ext uri="{FF2B5EF4-FFF2-40B4-BE49-F238E27FC236}">
-                <a16:creationId xmlns:a16="http://schemas.microsoft.com/office/drawing/2014/main" id="{B7E27356-567D-4AB0-9419-CB046DD30AF8}"/>
+                <a16:creationId xmlns:a16="http://schemas.microsoft.com/office/drawing/2014/main" id="{5C22AEC3-C960-4A8A-99DD-6098F153740C}"/>
               </a:ext>
             </a:extLst>
           </p:cNvPr>
@@ -12429,7 +10485,7 @@
                 <a:latin typeface="Meiryo"/>
                 <a:ea typeface="Meiryo"/>
                 <a:cs typeface="Meiryo"/>
-                <a:hlinkClick xmlns:r="http://schemas.openxmlformats.org/officeDocument/2006/relationships" r:id="Rf83dc4ffd8e74545"/>
+                <a:hlinkClick xmlns:r="http://schemas.openxmlformats.org/officeDocument/2006/relationships" r:id="R480969fbc12643df"/>
               </a:rPr>
               <a:t>App Storeで見る</a:t>
             </a:r>
@@ -12438,10 +10494,10 @@
       </p:sp>
       <p:sp>
         <p:nvSpPr>
-          <p:cNvPr id="11" name="unityroomでプレイ">
+          <p:cNvPr id="9" name="unityroomでプレイ">
             <a:extLst xmlns:a="http://schemas.openxmlformats.org/drawingml/2006/main">
               <a:ext uri="{FF2B5EF4-FFF2-40B4-BE49-F238E27FC236}">
-                <a16:creationId xmlns:a16="http://schemas.microsoft.com/office/drawing/2014/main" id="{88151891-B9D2-4690-801E-441B37F04F6C}"/>
+                <a16:creationId xmlns:a16="http://schemas.microsoft.com/office/drawing/2014/main" id="{1E0C26D1-71D8-4924-84EB-335624B636DA}"/>
               </a:ext>
             </a:extLst>
           </p:cNvPr>
@@ -12592,7 +10648,7 @@
                 <a:latin typeface="Meiryo"/>
                 <a:ea typeface="Meiryo"/>
                 <a:cs typeface="Meiryo"/>
-                <a:hlinkClick xmlns:r="http://schemas.openxmlformats.org/officeDocument/2006/relationships" r:id="R3b8f99d66e6f49a9"/>
+                <a:hlinkClick xmlns:r="http://schemas.openxmlformats.org/officeDocument/2006/relationships" r:id="R429f02ebcbc04d77"/>
               </a:rPr>
               <a:t>unityroomでプレイ</a:t>
             </a:r>
@@ -12602,7 +10658,7 @@
     </p:spTree>
     <p:extLst>
       <p:ext uri="{BB962C8B-B14F-4D97-AF65-F5344CB8AC3E}">
-        <p14:creationId xmlns:p14="http://schemas.microsoft.com/office/powerpoint/2010/main" val="847894131"/>
+        <p14:creationId xmlns:p14="http://schemas.microsoft.com/office/powerpoint/2010/main" val="665221946"/>
       </p:ext>
     </p:extLst>
   </p:cSld>
